--- a/dist/초4/사회·역사/지도와지역/초4_사회·역사_지도와지역_01_지도읽기.pptx
+++ b/dist/초4/사회·역사/지도와지역/초4_사회·역사_지도와지역_01_지도읽기.pptx
@@ -121,13 +121,13 @@
   <p:extLst>
     <p:ext uri="{521415D9-36F7-43E2-AB2F-B90AF26B5E84}">
       <p14:sectionLst xmlns:p14="http://schemas.microsoft.com/office/powerpoint/2010/main">
-        <p14:section name="도입" id="{e635c6ed-e780-9b9f-5525-e64cf3f48ddb}">
+        <p14:section name="도입" id="{761789bb-6b35-58b9-d4b0-90da370d2dda}">
           <p14:sldIdLst>
             <p14:sldId id="256"/>
             <p14:sldId id="257"/>
           </p14:sldIdLst>
         </p14:section>
-        <p14:section name="개념" id="{69241d65-42c1-8545-ab83-0aadd05af387}">
+        <p14:section name="개념" id="{4784c74f-a9c2-7a74-f625-795feb5f79ba}">
           <p14:sldIdLst>
             <p14:sldId id="258"/>
             <p14:sldId id="259"/>
@@ -135,7 +135,7 @@
             <p14:sldId id="264"/>
           </p14:sldIdLst>
         </p14:section>
-        <p14:section name="연습" id="{bf2a5d3c-7cba-0fa1-7760-15654a7dbfe1}">
+        <p14:section name="연습" id="{b03641a0-64b4-1e5a-a8e3-bd457b91a7d4}">
           <p14:sldIdLst>
             <p14:sldId id="260"/>
             <p14:sldId id="261"/>
@@ -143,31 +143,31 @@
             <p14:sldId id="265"/>
           </p14:sldIdLst>
         </p14:section>
-        <p14:section name="개념" id="{77ee6730-4d0a-11df-7c32-acf8ea181149}">
+        <p14:section name="개념" id="{c8a4eeb2-35be-3eb3-6f57-2fa30850bb28}">
           <p14:sldIdLst/>
         </p14:section>
-        <p14:section name="연습" id="{e4291842-aa85-ef3f-fd9e-5c0ae76c5f22}">
+        <p14:section name="연습" id="{bf693493-2954-1dd4-29cc-841945da6fc5}">
           <p14:sldIdLst/>
         </p14:section>
-        <p14:section name="개념" id="{d5fd9f58-d5ac-c04e-802f-cdaaa96a6e3f}">
+        <p14:section name="개념" id="{cf54ebec-a42a-40a9-cd37-c5d2c2c0fbba}">
           <p14:sldIdLst/>
         </p14:section>
-        <p14:section name="연습" id="{4eddf156-3bac-3c84-fec1-e2fe12b4ea11}">
+        <p14:section name="연습" id="{1530eeff-6d47-2bd9-ea8a-a76971a4c98d}">
           <p14:sldIdLst/>
         </p14:section>
-        <p14:section name="확인" id="{4422c1fa-2be9-2fb4-1ff8-ef33c147e002}">
+        <p14:section name="확인" id="{e81c746f-b834-5ca0-cd16-ba361c6ae9b0}">
           <p14:sldIdLst>
             <p14:sldId id="266"/>
             <p14:sldId id="267"/>
             <p14:sldId id="268"/>
           </p14:sldIdLst>
         </p14:section>
-        <p14:section name="정리" id="{9b3f1e39-4b9a-fdde-717b-a29252471825}">
+        <p14:section name="정리" id="{bebee90a-74a9-abf1-3511-334834d1013e}">
           <p14:sldIdLst>
             <p14:sldId id="269"/>
           </p14:sldIdLst>
         </p14:section>
-        <p14:section name="보충" id="{9a772fa2-ba71-6cd6-7b7f-5899c70f9c7c}">
+        <p14:section name="보충" id="{46f6520d-0dd7-dcf1-6301-d60fc31a20c4}">
           <p14:sldIdLst>
             <p14:sldId id="270"/>
           </p14:sldIdLst>
@@ -3643,8 +3643,8 @@
         </p:nvSpPr>
         <p:spPr>
           <a:xfrm>
-            <a:off x="7312914" y="1714500"/>
-            <a:ext cx="3474720" cy="2194560"/>
+            <a:off x="7514082" y="1898904"/>
+            <a:ext cx="3050032" cy="1926336"/>
           </a:xfrm>
           <a:custGeom>
             <a:avLst/>
@@ -3653,114 +3653,114 @@
             <a:cxnLst/>
             <a:rect l="l" t="t" r="r" b="b"/>
             <a:pathLst>
-              <a:path w="3474720" h="2194560">
+              <a:path w="3050032" h="1926336">
                 <a:moveTo>
-                  <a:pt x="3474720" y="1508760"/>
+                  <a:pt x="3050032" y="1324356"/>
                 </a:moveTo>
                 <a:lnTo>
-                  <a:pt x="3448202" y="1246784"/>
-                </a:lnTo>
-                <a:lnTo>
-                  <a:pt x="3370021" y="992581"/>
-                </a:lnTo>
-                <a:lnTo>
-                  <a:pt x="3242005" y="754380"/>
-                </a:lnTo>
-                <a:lnTo>
-                  <a:pt x="3068269" y="539039"/>
-                </a:lnTo>
-                <a:lnTo>
-                  <a:pt x="2854300" y="352958"/>
-                </a:lnTo>
-                <a:lnTo>
-                  <a:pt x="2606040" y="202082"/>
-                </a:lnTo>
-                <a:lnTo>
-                  <a:pt x="2331720" y="90983"/>
-                </a:lnTo>
-                <a:lnTo>
-                  <a:pt x="2039112" y="22860"/>
-                </a:lnTo>
-                <a:lnTo>
-                  <a:pt x="1737360" y="0"/>
-                </a:lnTo>
-                <a:lnTo>
-                  <a:pt x="1435608" y="22860"/>
-                </a:lnTo>
-                <a:lnTo>
-                  <a:pt x="1143000" y="90983"/>
-                </a:lnTo>
-                <a:lnTo>
-                  <a:pt x="868680" y="202082"/>
-                </a:lnTo>
-                <a:lnTo>
-                  <a:pt x="620420" y="352958"/>
-                </a:lnTo>
-                <a:lnTo>
-                  <a:pt x="406451" y="539039"/>
-                </a:lnTo>
-                <a:lnTo>
-                  <a:pt x="232715" y="754380"/>
-                </a:lnTo>
-                <a:lnTo>
-                  <a:pt x="104699" y="992581"/>
-                </a:lnTo>
-                <a:lnTo>
-                  <a:pt x="26518" y="1246784"/>
-                </a:lnTo>
-                <a:lnTo>
-                  <a:pt x="0" y="1508760"/>
-                </a:lnTo>
-                <a:lnTo>
-                  <a:pt x="26518" y="1627632"/>
-                </a:lnTo>
-                <a:lnTo>
-                  <a:pt x="104699" y="1743304"/>
-                </a:lnTo>
-                <a:lnTo>
-                  <a:pt x="232715" y="1851660"/>
-                </a:lnTo>
-                <a:lnTo>
-                  <a:pt x="406451" y="1949501"/>
-                </a:lnTo>
-                <a:lnTo>
-                  <a:pt x="620420" y="2034083"/>
-                </a:lnTo>
-                <a:lnTo>
-                  <a:pt x="868680" y="2102663"/>
-                </a:lnTo>
-                <a:lnTo>
-                  <a:pt x="1143000" y="2153412"/>
-                </a:lnTo>
-                <a:lnTo>
-                  <a:pt x="1435608" y="2184044"/>
-                </a:lnTo>
-                <a:lnTo>
-                  <a:pt x="1737360" y="2194560"/>
-                </a:lnTo>
-                <a:lnTo>
-                  <a:pt x="2039112" y="2184044"/>
-                </a:lnTo>
-                <a:lnTo>
-                  <a:pt x="2331720" y="2153412"/>
-                </a:lnTo>
-                <a:lnTo>
-                  <a:pt x="2606040" y="2102663"/>
-                </a:lnTo>
-                <a:lnTo>
-                  <a:pt x="2854300" y="2034083"/>
-                </a:lnTo>
-                <a:lnTo>
-                  <a:pt x="3068269" y="1949501"/>
-                </a:lnTo>
-                <a:lnTo>
-                  <a:pt x="3242005" y="1851660"/>
-                </a:lnTo>
-                <a:lnTo>
-                  <a:pt x="3370021" y="1743304"/>
-                </a:lnTo>
-                <a:lnTo>
-                  <a:pt x="3448202" y="1627632"/>
+                  <a:pt x="3026755" y="1094400"/>
+                </a:lnTo>
+                <a:lnTo>
+                  <a:pt x="2958130" y="871266"/>
+                </a:lnTo>
+                <a:lnTo>
+                  <a:pt x="2845760" y="662178"/>
+                </a:lnTo>
+                <a:lnTo>
+                  <a:pt x="2693259" y="473156"/>
+                </a:lnTo>
+                <a:lnTo>
+                  <a:pt x="2505441" y="309819"/>
+                </a:lnTo>
+                <a:lnTo>
+                  <a:pt x="2287524" y="177383"/>
+                </a:lnTo>
+                <a:lnTo>
+                  <a:pt x="2046732" y="79863"/>
+                </a:lnTo>
+                <a:lnTo>
+                  <a:pt x="1789887" y="20066"/>
+                </a:lnTo>
+                <a:lnTo>
+                  <a:pt x="1525016" y="0"/>
+                </a:lnTo>
+                <a:lnTo>
+                  <a:pt x="1260145" y="20066"/>
+                </a:lnTo>
+                <a:lnTo>
+                  <a:pt x="1003300" y="79863"/>
+                </a:lnTo>
+                <a:lnTo>
+                  <a:pt x="762508" y="177383"/>
+                </a:lnTo>
+                <a:lnTo>
+                  <a:pt x="544591" y="309819"/>
+                </a:lnTo>
+                <a:lnTo>
+                  <a:pt x="356773" y="473156"/>
+                </a:lnTo>
+                <a:lnTo>
+                  <a:pt x="204272" y="662178"/>
+                </a:lnTo>
+                <a:lnTo>
+                  <a:pt x="91902" y="871266"/>
+                </a:lnTo>
+                <a:lnTo>
+                  <a:pt x="23277" y="1094400"/>
+                </a:lnTo>
+                <a:lnTo>
+                  <a:pt x="0" y="1324356"/>
+                </a:lnTo>
+                <a:lnTo>
+                  <a:pt x="23277" y="1428699"/>
+                </a:lnTo>
+                <a:lnTo>
+                  <a:pt x="91902" y="1530233"/>
+                </a:lnTo>
+                <a:lnTo>
+                  <a:pt x="204272" y="1625346"/>
+                </a:lnTo>
+                <a:lnTo>
+                  <a:pt x="356773" y="1711228"/>
+                </a:lnTo>
+                <a:lnTo>
+                  <a:pt x="544591" y="1785473"/>
+                </a:lnTo>
+                <a:lnTo>
+                  <a:pt x="762508" y="1845671"/>
+                </a:lnTo>
+                <a:lnTo>
+                  <a:pt x="1003300" y="1890217"/>
+                </a:lnTo>
+                <a:lnTo>
+                  <a:pt x="1260145" y="1917106"/>
+                </a:lnTo>
+                <a:lnTo>
+                  <a:pt x="1525016" y="1926336"/>
+                </a:lnTo>
+                <a:lnTo>
+                  <a:pt x="1789887" y="1917106"/>
+                </a:lnTo>
+                <a:lnTo>
+                  <a:pt x="2046732" y="1890217"/>
+                </a:lnTo>
+                <a:lnTo>
+                  <a:pt x="2287524" y="1845671"/>
+                </a:lnTo>
+                <a:lnTo>
+                  <a:pt x="2505441" y="1785473"/>
+                </a:lnTo>
+                <a:lnTo>
+                  <a:pt x="2693259" y="1711228"/>
+                </a:lnTo>
+                <a:lnTo>
+                  <a:pt x="2845760" y="1625346"/>
+                </a:lnTo>
+                <a:lnTo>
+                  <a:pt x="2958130" y="1530233"/>
+                </a:lnTo>
+                <a:lnTo>
+                  <a:pt x="3026755" y="1428699"/>
                 </a:lnTo>
                 <a:close/>
               </a:path>
@@ -3785,8 +3785,8 @@
         </p:nvSpPr>
         <p:spPr>
           <a:xfrm>
-            <a:off x="7815834" y="2263140"/>
-            <a:ext cx="2468880" cy="1417320"/>
+            <a:off x="7955534" y="2380488"/>
+            <a:ext cx="2167128" cy="1244092"/>
           </a:xfrm>
           <a:custGeom>
             <a:avLst/>
@@ -3795,114 +3795,114 @@
             <a:cxnLst/>
             <a:rect l="l" t="t" r="r" b="b"/>
             <a:pathLst>
-              <a:path w="2468880" h="1417320">
+              <a:path w="2167128" h="1244092">
                 <a:moveTo>
-                  <a:pt x="2468880" y="960120"/>
+                  <a:pt x="2167128" y="842772"/>
                 </a:moveTo>
                 <a:lnTo>
-                  <a:pt x="2450135" y="793242"/>
-                </a:lnTo>
-                <a:lnTo>
-                  <a:pt x="2394356" y="631850"/>
-                </a:lnTo>
-                <a:lnTo>
-                  <a:pt x="2303374" y="480060"/>
-                </a:lnTo>
-                <a:lnTo>
-                  <a:pt x="2179930" y="342900"/>
-                </a:lnTo>
-                <a:lnTo>
-                  <a:pt x="2028139" y="224485"/>
-                </a:lnTo>
-                <a:lnTo>
-                  <a:pt x="1851660" y="128473"/>
-                </a:lnTo>
-                <a:lnTo>
-                  <a:pt x="1656436" y="58064"/>
-                </a:lnTo>
-                <a:lnTo>
-                  <a:pt x="1448867" y="14630"/>
-                </a:lnTo>
-                <a:lnTo>
-                  <a:pt x="1234440" y="0"/>
-                </a:lnTo>
-                <a:lnTo>
-                  <a:pt x="1020013" y="14630"/>
-                </a:lnTo>
-                <a:lnTo>
-                  <a:pt x="812444" y="58064"/>
-                </a:lnTo>
-                <a:lnTo>
-                  <a:pt x="617220" y="128473"/>
-                </a:lnTo>
-                <a:lnTo>
-                  <a:pt x="440741" y="224485"/>
-                </a:lnTo>
-                <a:lnTo>
-                  <a:pt x="288950" y="342900"/>
-                </a:lnTo>
-                <a:lnTo>
-                  <a:pt x="165506" y="480060"/>
-                </a:lnTo>
-                <a:lnTo>
-                  <a:pt x="74524" y="631850"/>
-                </a:lnTo>
-                <a:lnTo>
-                  <a:pt x="18745" y="793242"/>
-                </a:lnTo>
-                <a:lnTo>
-                  <a:pt x="0" y="960120"/>
-                </a:lnTo>
-                <a:lnTo>
-                  <a:pt x="18745" y="1039673"/>
-                </a:lnTo>
-                <a:lnTo>
-                  <a:pt x="74524" y="1116482"/>
-                </a:lnTo>
-                <a:lnTo>
-                  <a:pt x="165506" y="1188720"/>
-                </a:lnTo>
-                <a:lnTo>
-                  <a:pt x="288950" y="1254100"/>
-                </a:lnTo>
-                <a:lnTo>
-                  <a:pt x="440741" y="1310335"/>
-                </a:lnTo>
-                <a:lnTo>
-                  <a:pt x="617220" y="1356055"/>
-                </a:lnTo>
-                <a:lnTo>
-                  <a:pt x="812444" y="1389888"/>
-                </a:lnTo>
-                <a:lnTo>
-                  <a:pt x="1020013" y="1410462"/>
-                </a:lnTo>
-                <a:lnTo>
-                  <a:pt x="1234440" y="1417320"/>
-                </a:lnTo>
-                <a:lnTo>
-                  <a:pt x="1448867" y="1410462"/>
-                </a:lnTo>
-                <a:lnTo>
-                  <a:pt x="1656436" y="1389888"/>
-                </a:lnTo>
-                <a:lnTo>
-                  <a:pt x="1851660" y="1356055"/>
-                </a:lnTo>
-                <a:lnTo>
-                  <a:pt x="2028139" y="1310335"/>
-                </a:lnTo>
-                <a:lnTo>
-                  <a:pt x="2179930" y="1254100"/>
-                </a:lnTo>
-                <a:lnTo>
-                  <a:pt x="2303374" y="1188720"/>
-                </a:lnTo>
-                <a:lnTo>
-                  <a:pt x="2394356" y="1116482"/>
-                </a:lnTo>
-                <a:lnTo>
-                  <a:pt x="2450135" y="1039673"/>
+                  <a:pt x="2150674" y="696290"/>
+                </a:lnTo>
+                <a:lnTo>
+                  <a:pt x="2101713" y="554624"/>
+                </a:lnTo>
+                <a:lnTo>
+                  <a:pt x="2021850" y="421386"/>
+                </a:lnTo>
+                <a:lnTo>
+                  <a:pt x="1913494" y="300990"/>
+                </a:lnTo>
+                <a:lnTo>
+                  <a:pt x="1780256" y="197048"/>
+                </a:lnTo>
+                <a:lnTo>
+                  <a:pt x="1625346" y="112771"/>
+                </a:lnTo>
+                <a:lnTo>
+                  <a:pt x="1453982" y="50968"/>
+                </a:lnTo>
+                <a:lnTo>
+                  <a:pt x="1271783" y="12842"/>
+                </a:lnTo>
+                <a:lnTo>
+                  <a:pt x="1083564" y="0"/>
+                </a:lnTo>
+                <a:lnTo>
+                  <a:pt x="895345" y="12842"/>
+                </a:lnTo>
+                <a:lnTo>
+                  <a:pt x="713146" y="50968"/>
+                </a:lnTo>
+                <a:lnTo>
+                  <a:pt x="541782" y="112771"/>
+                </a:lnTo>
+                <a:lnTo>
+                  <a:pt x="386872" y="197048"/>
+                </a:lnTo>
+                <a:lnTo>
+                  <a:pt x="253634" y="300990"/>
+                </a:lnTo>
+                <a:lnTo>
+                  <a:pt x="145278" y="421386"/>
+                </a:lnTo>
+                <a:lnTo>
+                  <a:pt x="65415" y="554624"/>
+                </a:lnTo>
+                <a:lnTo>
+                  <a:pt x="16454" y="696290"/>
+                </a:lnTo>
+                <a:lnTo>
+                  <a:pt x="0" y="842772"/>
+                </a:lnTo>
+                <a:lnTo>
+                  <a:pt x="16454" y="912602"/>
+                </a:lnTo>
+                <a:lnTo>
+                  <a:pt x="65415" y="980023"/>
+                </a:lnTo>
+                <a:lnTo>
+                  <a:pt x="145278" y="1043432"/>
+                </a:lnTo>
+                <a:lnTo>
+                  <a:pt x="253634" y="1100821"/>
+                </a:lnTo>
+                <a:lnTo>
+                  <a:pt x="386872" y="1150183"/>
+                </a:lnTo>
+                <a:lnTo>
+                  <a:pt x="541782" y="1190315"/>
+                </a:lnTo>
+                <a:lnTo>
+                  <a:pt x="713146" y="1220013"/>
+                </a:lnTo>
+                <a:lnTo>
+                  <a:pt x="895345" y="1238072"/>
+                </a:lnTo>
+                <a:lnTo>
+                  <a:pt x="1083564" y="1244092"/>
+                </a:lnTo>
+                <a:lnTo>
+                  <a:pt x="1271783" y="1238072"/>
+                </a:lnTo>
+                <a:lnTo>
+                  <a:pt x="1453982" y="1220013"/>
+                </a:lnTo>
+                <a:lnTo>
+                  <a:pt x="1625346" y="1190315"/>
+                </a:lnTo>
+                <a:lnTo>
+                  <a:pt x="1780256" y="1150183"/>
+                </a:lnTo>
+                <a:lnTo>
+                  <a:pt x="1913494" y="1100821"/>
+                </a:lnTo>
+                <a:lnTo>
+                  <a:pt x="2021850" y="1043432"/>
+                </a:lnTo>
+                <a:lnTo>
+                  <a:pt x="2101713" y="980023"/>
+                </a:lnTo>
+                <a:lnTo>
+                  <a:pt x="2150674" y="912602"/>
                 </a:lnTo>
                 <a:close/>
               </a:path>
@@ -3927,8 +3927,8 @@
         </p:nvSpPr>
         <p:spPr>
           <a:xfrm>
-            <a:off x="8364474" y="2766060"/>
-            <a:ext cx="1371600" cy="685800"/>
+            <a:off x="8437118" y="2821940"/>
+            <a:ext cx="1203960" cy="601980"/>
           </a:xfrm>
           <a:custGeom>
             <a:avLst/>
@@ -3937,114 +3937,114 @@
             <a:cxnLst/>
             <a:rect l="l" t="t" r="r" b="b"/>
             <a:pathLst>
-              <a:path w="1371600" h="685800">
+              <a:path w="1203960" h="601980">
                 <a:moveTo>
-                  <a:pt x="1371600" y="457200"/>
+                  <a:pt x="1203960" y="401320"/>
                 </a:moveTo>
                 <a:lnTo>
-                  <a:pt x="1361084" y="377647"/>
-                </a:lnTo>
-                <a:lnTo>
-                  <a:pt x="1330452" y="300838"/>
-                </a:lnTo>
-                <a:lnTo>
-                  <a:pt x="1279703" y="228600"/>
-                </a:lnTo>
-                <a:lnTo>
-                  <a:pt x="1211123" y="163220"/>
-                </a:lnTo>
-                <a:lnTo>
-                  <a:pt x="1126541" y="106985"/>
-                </a:lnTo>
-                <a:lnTo>
-                  <a:pt x="1028700" y="61265"/>
-                </a:lnTo>
-                <a:lnTo>
-                  <a:pt x="920344" y="27432"/>
-                </a:lnTo>
-                <a:lnTo>
-                  <a:pt x="804672" y="6858"/>
-                </a:lnTo>
-                <a:lnTo>
-                  <a:pt x="685800" y="0"/>
-                </a:lnTo>
-                <a:lnTo>
-                  <a:pt x="566928" y="6858"/>
-                </a:lnTo>
-                <a:lnTo>
-                  <a:pt x="451256" y="27432"/>
-                </a:lnTo>
-                <a:lnTo>
-                  <a:pt x="342900" y="61265"/>
-                </a:lnTo>
-                <a:lnTo>
-                  <a:pt x="245059" y="106985"/>
-                </a:lnTo>
-                <a:lnTo>
-                  <a:pt x="160477" y="163220"/>
-                </a:lnTo>
-                <a:lnTo>
-                  <a:pt x="91897" y="228600"/>
-                </a:lnTo>
-                <a:lnTo>
-                  <a:pt x="41148" y="300838"/>
-                </a:lnTo>
-                <a:lnTo>
-                  <a:pt x="10516" y="377647"/>
-                </a:lnTo>
-                <a:lnTo>
-                  <a:pt x="0" y="457200"/>
-                </a:lnTo>
-                <a:lnTo>
-                  <a:pt x="10516" y="496976"/>
-                </a:lnTo>
-                <a:lnTo>
-                  <a:pt x="41148" y="535381"/>
-                </a:lnTo>
-                <a:lnTo>
-                  <a:pt x="91897" y="571500"/>
-                </a:lnTo>
-                <a:lnTo>
-                  <a:pt x="160477" y="603961"/>
-                </a:lnTo>
-                <a:lnTo>
-                  <a:pt x="245059" y="632308"/>
-                </a:lnTo>
-                <a:lnTo>
-                  <a:pt x="342900" y="655168"/>
-                </a:lnTo>
-                <a:lnTo>
-                  <a:pt x="451256" y="672084"/>
-                </a:lnTo>
-                <a:lnTo>
-                  <a:pt x="566928" y="682142"/>
-                </a:lnTo>
-                <a:lnTo>
-                  <a:pt x="685800" y="685800"/>
-                </a:lnTo>
-                <a:lnTo>
-                  <a:pt x="804672" y="682142"/>
-                </a:lnTo>
-                <a:lnTo>
-                  <a:pt x="920344" y="672084"/>
-                </a:lnTo>
-                <a:lnTo>
-                  <a:pt x="1028700" y="655168"/>
-                </a:lnTo>
-                <a:lnTo>
-                  <a:pt x="1126541" y="632308"/>
-                </a:lnTo>
-                <a:lnTo>
-                  <a:pt x="1211123" y="603961"/>
-                </a:lnTo>
-                <a:lnTo>
-                  <a:pt x="1279703" y="571500"/>
-                </a:lnTo>
-                <a:lnTo>
-                  <a:pt x="1330452" y="535381"/>
-                </a:lnTo>
-                <a:lnTo>
-                  <a:pt x="1361084" y="496976"/>
+                  <a:pt x="1194730" y="331490"/>
+                </a:lnTo>
+                <a:lnTo>
+                  <a:pt x="1167841" y="264069"/>
+                </a:lnTo>
+                <a:lnTo>
+                  <a:pt x="1123295" y="200660"/>
+                </a:lnTo>
+                <a:lnTo>
+                  <a:pt x="1063097" y="143271"/>
+                </a:lnTo>
+                <a:lnTo>
+                  <a:pt x="988852" y="93909"/>
+                </a:lnTo>
+                <a:lnTo>
+                  <a:pt x="902970" y="53777"/>
+                </a:lnTo>
+                <a:lnTo>
+                  <a:pt x="807857" y="24079"/>
+                </a:lnTo>
+                <a:lnTo>
+                  <a:pt x="706323" y="6020"/>
+                </a:lnTo>
+                <a:lnTo>
+                  <a:pt x="601980" y="0"/>
+                </a:lnTo>
+                <a:lnTo>
+                  <a:pt x="497637" y="6020"/>
+                </a:lnTo>
+                <a:lnTo>
+                  <a:pt x="396103" y="24079"/>
+                </a:lnTo>
+                <a:lnTo>
+                  <a:pt x="300990" y="53777"/>
+                </a:lnTo>
+                <a:lnTo>
+                  <a:pt x="215108" y="93909"/>
+                </a:lnTo>
+                <a:lnTo>
+                  <a:pt x="140863" y="143271"/>
+                </a:lnTo>
+                <a:lnTo>
+                  <a:pt x="80665" y="200660"/>
+                </a:lnTo>
+                <a:lnTo>
+                  <a:pt x="36119" y="264069"/>
+                </a:lnTo>
+                <a:lnTo>
+                  <a:pt x="9230" y="331490"/>
+                </a:lnTo>
+                <a:lnTo>
+                  <a:pt x="0" y="401320"/>
+                </a:lnTo>
+                <a:lnTo>
+                  <a:pt x="9230" y="436235"/>
+                </a:lnTo>
+                <a:lnTo>
+                  <a:pt x="36119" y="469946"/>
+                </a:lnTo>
+                <a:lnTo>
+                  <a:pt x="80665" y="501650"/>
+                </a:lnTo>
+                <a:lnTo>
+                  <a:pt x="140863" y="530144"/>
+                </a:lnTo>
+                <a:lnTo>
+                  <a:pt x="215108" y="555026"/>
+                </a:lnTo>
+                <a:lnTo>
+                  <a:pt x="300990" y="575092"/>
+                </a:lnTo>
+                <a:lnTo>
+                  <a:pt x="396103" y="589940"/>
+                </a:lnTo>
+                <a:lnTo>
+                  <a:pt x="497637" y="598769"/>
+                </a:lnTo>
+                <a:lnTo>
+                  <a:pt x="601980" y="601980"/>
+                </a:lnTo>
+                <a:lnTo>
+                  <a:pt x="706323" y="598769"/>
+                </a:lnTo>
+                <a:lnTo>
+                  <a:pt x="807857" y="589940"/>
+                </a:lnTo>
+                <a:lnTo>
+                  <a:pt x="902970" y="575092"/>
+                </a:lnTo>
+                <a:lnTo>
+                  <a:pt x="988852" y="555026"/>
+                </a:lnTo>
+                <a:lnTo>
+                  <a:pt x="1063097" y="530144"/>
+                </a:lnTo>
+                <a:lnTo>
+                  <a:pt x="1123295" y="501650"/>
+                </a:lnTo>
+                <a:lnTo>
+                  <a:pt x="1167841" y="469946"/>
+                </a:lnTo>
+                <a:lnTo>
+                  <a:pt x="1194730" y="436235"/>
                 </a:lnTo>
                 <a:close/>
               </a:path>
@@ -4069,8 +4069,8 @@
         </p:nvSpPr>
         <p:spPr>
           <a:xfrm>
-            <a:off x="8937346" y="3117647"/>
-            <a:ext cx="225857" cy="196139"/>
+            <a:off x="8939972" y="3130555"/>
+            <a:ext cx="198252" cy="172166"/>
           </a:xfrm>
           <a:custGeom>
             <a:avLst/>
@@ -4079,15 +4079,15 @@
             <a:cxnLst/>
             <a:rect l="l" t="t" r="r" b="b"/>
             <a:pathLst>
-              <a:path w="225857" h="196139">
+              <a:path w="198252" h="172166">
                 <a:moveTo>
-                  <a:pt x="0" y="196139"/>
+                  <a:pt x="0" y="172166"/>
                 </a:moveTo>
                 <a:lnTo>
-                  <a:pt x="225857" y="196139"/>
-                </a:lnTo>
-                <a:lnTo>
-                  <a:pt x="112928" y="0"/>
+                  <a:pt x="198252" y="172166"/>
+                </a:lnTo>
+                <a:lnTo>
+                  <a:pt x="99126" y="0"/>
                 </a:lnTo>
                 <a:close/>
               </a:path>
@@ -4112,8 +4112,8 @@
         </p:nvSpPr>
         <p:spPr>
           <a:xfrm>
-            <a:off x="7358634" y="1623060"/>
-            <a:ext cx="1508760" cy="1485900"/>
+            <a:off x="7554214" y="1818640"/>
+            <a:ext cx="1324356" cy="1304290"/>
           </a:xfrm>
           <a:custGeom>
             <a:avLst/>
@@ -4122,15 +4122,15 @@
             <a:cxnLst/>
             <a:rect l="l" t="t" r="r" b="b"/>
             <a:pathLst>
-              <a:path w="1508760" h="1485900">
+              <a:path w="1324356" h="1304290">
                 <a:moveTo>
                   <a:pt x="0" y="0"/>
                 </a:moveTo>
                 <a:lnTo>
-                  <a:pt x="731520" y="548640"/>
-                </a:lnTo>
-                <a:lnTo>
-                  <a:pt x="1508760" y="1485900"/>
+                  <a:pt x="642112" y="481584"/>
+                </a:lnTo>
+                <a:lnTo>
+                  <a:pt x="1324356" y="1304290"/>
                 </a:lnTo>
               </a:path>
             </a:pathLst>
@@ -4152,8 +4152,8 @@
         </p:nvSpPr>
         <p:spPr>
           <a:xfrm>
-            <a:off x="9095994" y="3383280"/>
-            <a:ext cx="365760" cy="1440180"/>
+            <a:off x="9079230" y="3363722"/>
+            <a:ext cx="321056" cy="1264158"/>
           </a:xfrm>
           <a:custGeom>
             <a:avLst/>
@@ -4162,12 +4162,12 @@
             <a:cxnLst/>
             <a:rect l="l" t="t" r="r" b="b"/>
             <a:pathLst>
-              <a:path w="365760" h="1440180">
+              <a:path w="321056" h="1264158">
                 <a:moveTo>
-                  <a:pt x="365760" y="1440180"/>
+                  <a:pt x="321056" y="1264158"/>
                 </a:moveTo>
                 <a:lnTo>
-                  <a:pt x="205740" y="708660"/>
+                  <a:pt x="180594" y="622046"/>
                 </a:lnTo>
                 <a:lnTo>
                   <a:pt x="0" y="0"/>
@@ -4192,7 +4192,7 @@
         </p:nvSpPr>
         <p:spPr>
           <a:xfrm>
-            <a:off x="6971538" y="1264920"/>
+            <a:off x="7195058" y="1485646"/>
             <a:ext cx="316992" cy="304800"/>
           </a:xfrm>
           <a:prstGeom prst="rect">
@@ -4212,7 +4212,7 @@
         </p:nvSpPr>
         <p:spPr>
           <a:xfrm>
-            <a:off x="6925818" y="1226820"/>
+            <a:off x="7149338" y="1447546"/>
             <a:ext cx="408432" cy="381000"/>
           </a:xfrm>
           <a:prstGeom prst="rect">
@@ -4251,7 +4251,7 @@
         </p:nvSpPr>
         <p:spPr>
           <a:xfrm>
-            <a:off x="9531858" y="4876800"/>
+            <a:off x="9442450" y="4656074"/>
             <a:ext cx="316992" cy="304800"/>
           </a:xfrm>
           <a:prstGeom prst="rect">
@@ -4271,7 +4271,7 @@
         </p:nvSpPr>
         <p:spPr>
           <a:xfrm>
-            <a:off x="9486138" y="4838700"/>
+            <a:off x="9396730" y="4617974"/>
             <a:ext cx="408432" cy="381000"/>
           </a:xfrm>
           <a:prstGeom prst="rect">
@@ -4310,7 +4310,7 @@
         </p:nvSpPr>
         <p:spPr>
           <a:xfrm>
-            <a:off x="9856318" y="1915058"/>
+            <a:off x="9708627" y="2056323"/>
             <a:ext cx="621792" cy="304800"/>
           </a:xfrm>
           <a:prstGeom prst="rect">
@@ -4330,7 +4330,7 @@
         </p:nvSpPr>
         <p:spPr>
           <a:xfrm>
-            <a:off x="9810598" y="1876958"/>
+            <a:off x="9662907" y="2018223"/>
             <a:ext cx="713232" cy="381000"/>
           </a:xfrm>
           <a:prstGeom prst="rect">
@@ -4369,7 +4369,7 @@
         </p:nvSpPr>
         <p:spPr>
           <a:xfrm>
-            <a:off x="9533077" y="2335225"/>
+            <a:off x="9424894" y="2425136"/>
             <a:ext cx="621792" cy="304800"/>
           </a:xfrm>
           <a:prstGeom prst="rect">
@@ -4389,7 +4389,7 @@
         </p:nvSpPr>
         <p:spPr>
           <a:xfrm>
-            <a:off x="9487357" y="2297125"/>
+            <a:off x="9379174" y="2387036"/>
             <a:ext cx="713232" cy="381000"/>
           </a:xfrm>
           <a:prstGeom prst="rect">
@@ -4428,7 +4428,7 @@
         </p:nvSpPr>
         <p:spPr>
           <a:xfrm>
-            <a:off x="9180119" y="2720645"/>
+            <a:off x="9115074" y="2763449"/>
             <a:ext cx="621792" cy="304800"/>
           </a:xfrm>
           <a:prstGeom prst="rect">
@@ -4448,7 +4448,7 @@
         </p:nvSpPr>
         <p:spPr>
           <a:xfrm>
-            <a:off x="9134399" y="2682545"/>
+            <a:off x="9069354" y="2725349"/>
             <a:ext cx="713232" cy="381000"/>
           </a:xfrm>
           <a:prstGeom prst="rect">
@@ -8710,8 +8710,8 @@
         </p:nvSpPr>
         <p:spPr>
           <a:xfrm>
-            <a:off x="7413380" y="2103526"/>
-            <a:ext cx="4117233" cy="2983502"/>
+            <a:off x="7496748" y="2320539"/>
+            <a:ext cx="3895134" cy="2822561"/>
           </a:xfrm>
           <a:custGeom>
             <a:avLst/>
@@ -8720,114 +8720,114 @@
             <a:cxnLst/>
             <a:rect l="l" t="t" r="r" b="b"/>
             <a:pathLst>
-              <a:path w="4117233" h="2983502">
+              <a:path w="3895134" h="2822561">
                 <a:moveTo>
-                  <a:pt x="4117233" y="1491751"/>
+                  <a:pt x="3895134" y="1411280"/>
                 </a:moveTo>
                 <a:lnTo>
-                  <a:pt x="4071884" y="1232783"/>
-                </a:lnTo>
-                <a:lnTo>
-                  <a:pt x="3937030" y="981572"/>
-                </a:lnTo>
-                <a:lnTo>
-                  <a:pt x="3717444" y="745876"/>
-                </a:lnTo>
-                <a:lnTo>
-                  <a:pt x="3419094" y="532854"/>
-                </a:lnTo>
-                <a:lnTo>
-                  <a:pt x="3051526" y="349070"/>
-                </a:lnTo>
-                <a:lnTo>
-                  <a:pt x="2625482" y="199895"/>
-                </a:lnTo>
-                <a:lnTo>
-                  <a:pt x="2154089" y="90102"/>
-                </a:lnTo>
-                <a:lnTo>
-                  <a:pt x="1651667" y="22675"/>
-                </a:lnTo>
-                <a:lnTo>
-                  <a:pt x="1133731" y="0"/>
-                </a:lnTo>
-                <a:lnTo>
-                  <a:pt x="936820" y="22675"/>
-                </a:lnTo>
-                <a:lnTo>
-                  <a:pt x="745876" y="90102"/>
-                </a:lnTo>
-                <a:lnTo>
-                  <a:pt x="566865" y="199895"/>
-                </a:lnTo>
-                <a:lnTo>
-                  <a:pt x="405160" y="349070"/>
-                </a:lnTo>
-                <a:lnTo>
-                  <a:pt x="265532" y="532854"/>
-                </a:lnTo>
-                <a:lnTo>
-                  <a:pt x="152159" y="745876"/>
-                </a:lnTo>
-                <a:lnTo>
-                  <a:pt x="68621" y="981572"/>
-                </a:lnTo>
-                <a:lnTo>
-                  <a:pt x="17304" y="1232783"/>
-                </a:lnTo>
-                <a:lnTo>
-                  <a:pt x="0" y="1491751"/>
-                </a:lnTo>
-                <a:lnTo>
-                  <a:pt x="17304" y="1750719"/>
-                </a:lnTo>
-                <a:lnTo>
-                  <a:pt x="68621" y="2001930"/>
-                </a:lnTo>
-                <a:lnTo>
-                  <a:pt x="152159" y="2237627"/>
-                </a:lnTo>
-                <a:lnTo>
-                  <a:pt x="265532" y="2450649"/>
-                </a:lnTo>
-                <a:lnTo>
-                  <a:pt x="405160" y="2634433"/>
-                </a:lnTo>
-                <a:lnTo>
-                  <a:pt x="566865" y="2783608"/>
-                </a:lnTo>
-                <a:lnTo>
-                  <a:pt x="745876" y="2893401"/>
-                </a:lnTo>
-                <a:lnTo>
-                  <a:pt x="936820" y="2960828"/>
-                </a:lnTo>
-                <a:lnTo>
-                  <a:pt x="1133731" y="2983502"/>
-                </a:lnTo>
-                <a:lnTo>
-                  <a:pt x="1651667" y="2960828"/>
-                </a:lnTo>
-                <a:lnTo>
-                  <a:pt x="2154089" y="2893401"/>
-                </a:lnTo>
-                <a:lnTo>
-                  <a:pt x="2625482" y="2783608"/>
-                </a:lnTo>
-                <a:lnTo>
-                  <a:pt x="3051526" y="2634433"/>
-                </a:lnTo>
-                <a:lnTo>
-                  <a:pt x="3419094" y="2450649"/>
-                </a:lnTo>
-                <a:lnTo>
-                  <a:pt x="3717444" y="2237627"/>
-                </a:lnTo>
-                <a:lnTo>
-                  <a:pt x="3937030" y="2001930"/>
-                </a:lnTo>
-                <a:lnTo>
-                  <a:pt x="4071884" y="1750719"/>
+                  <a:pt x="3852231" y="1166282"/>
+                </a:lnTo>
+                <a:lnTo>
+                  <a:pt x="3724651" y="928622"/>
+                </a:lnTo>
+                <a:lnTo>
+                  <a:pt x="3516910" y="705640"/>
+                </a:lnTo>
+                <a:lnTo>
+                  <a:pt x="3234654" y="504109"/>
+                </a:lnTo>
+                <a:lnTo>
+                  <a:pt x="2886915" y="330240"/>
+                </a:lnTo>
+                <a:lnTo>
+                  <a:pt x="2483853" y="189112"/>
+                </a:lnTo>
+                <a:lnTo>
+                  <a:pt x="2037889" y="85241"/>
+                </a:lnTo>
+                <a:lnTo>
+                  <a:pt x="1562570" y="21451"/>
+                </a:lnTo>
+                <a:lnTo>
+                  <a:pt x="1072573" y="0"/>
+                </a:lnTo>
+                <a:lnTo>
+                  <a:pt x="886284" y="21451"/>
+                </a:lnTo>
+                <a:lnTo>
+                  <a:pt x="705640" y="85241"/>
+                </a:lnTo>
+                <a:lnTo>
+                  <a:pt x="536287" y="189112"/>
+                </a:lnTo>
+                <a:lnTo>
+                  <a:pt x="383304" y="330240"/>
+                </a:lnTo>
+                <a:lnTo>
+                  <a:pt x="251208" y="504109"/>
+                </a:lnTo>
+                <a:lnTo>
+                  <a:pt x="143951" y="705640"/>
+                </a:lnTo>
+                <a:lnTo>
+                  <a:pt x="64919" y="928622"/>
+                </a:lnTo>
+                <a:lnTo>
+                  <a:pt x="16371" y="1166282"/>
+                </a:lnTo>
+                <a:lnTo>
+                  <a:pt x="0" y="1411280"/>
+                </a:lnTo>
+                <a:lnTo>
+                  <a:pt x="16371" y="1656279"/>
+                </a:lnTo>
+                <a:lnTo>
+                  <a:pt x="64919" y="1893938"/>
+                </a:lnTo>
+                <a:lnTo>
+                  <a:pt x="143951" y="2116920"/>
+                </a:lnTo>
+                <a:lnTo>
+                  <a:pt x="251208" y="2318451"/>
+                </a:lnTo>
+                <a:lnTo>
+                  <a:pt x="383304" y="2492321"/>
+                </a:lnTo>
+                <a:lnTo>
+                  <a:pt x="536287" y="2633449"/>
+                </a:lnTo>
+                <a:lnTo>
+                  <a:pt x="705640" y="2737319"/>
+                </a:lnTo>
+                <a:lnTo>
+                  <a:pt x="886284" y="2801109"/>
+                </a:lnTo>
+                <a:lnTo>
+                  <a:pt x="1072573" y="2822561"/>
+                </a:lnTo>
+                <a:lnTo>
+                  <a:pt x="1562570" y="2801109"/>
+                </a:lnTo>
+                <a:lnTo>
+                  <a:pt x="2037889" y="2737319"/>
+                </a:lnTo>
+                <a:lnTo>
+                  <a:pt x="2483853" y="2633449"/>
+                </a:lnTo>
+                <a:lnTo>
+                  <a:pt x="2886915" y="2492321"/>
+                </a:lnTo>
+                <a:lnTo>
+                  <a:pt x="3234654" y="2318451"/>
+                </a:lnTo>
+                <a:lnTo>
+                  <a:pt x="3516910" y="2116920"/>
+                </a:lnTo>
+                <a:lnTo>
+                  <a:pt x="3724651" y="1893938"/>
+                </a:lnTo>
+                <a:lnTo>
+                  <a:pt x="3852231" y="1656279"/>
                 </a:lnTo>
                 <a:close/>
               </a:path>
@@ -8852,8 +8852,8 @@
         </p:nvSpPr>
         <p:spPr>
           <a:xfrm>
-            <a:off x="7801235" y="2580886"/>
-            <a:ext cx="2774657" cy="2028782"/>
+            <a:off x="7863681" y="2772149"/>
+            <a:ext cx="2624981" cy="1919341"/>
           </a:xfrm>
           <a:custGeom>
             <a:avLst/>
@@ -8862,114 +8862,114 @@
             <a:cxnLst/>
             <a:rect l="l" t="t" r="r" b="b"/>
             <a:pathLst>
-              <a:path w="2774657" h="2028782">
+              <a:path w="2624981" h="1919341">
                 <a:moveTo>
-                  <a:pt x="2774657" y="1014391"/>
+                  <a:pt x="2624981" y="959671"/>
                 </a:moveTo>
                 <a:lnTo>
-                  <a:pt x="2743629" y="838364"/>
-                </a:lnTo>
-                <a:lnTo>
-                  <a:pt x="2652334" y="667708"/>
-                </a:lnTo>
-                <a:lnTo>
-                  <a:pt x="2502562" y="507195"/>
-                </a:lnTo>
-                <a:lnTo>
-                  <a:pt x="2300280" y="362197"/>
-                </a:lnTo>
-                <a:lnTo>
-                  <a:pt x="2049666" y="237487"/>
-                </a:lnTo>
-                <a:lnTo>
-                  <a:pt x="1760266" y="136048"/>
-                </a:lnTo>
-                <a:lnTo>
-                  <a:pt x="1439838" y="61460"/>
-                </a:lnTo>
-                <a:lnTo>
-                  <a:pt x="1097929" y="15514"/>
-                </a:lnTo>
-                <a:lnTo>
-                  <a:pt x="745876" y="0"/>
-                </a:lnTo>
-                <a:lnTo>
-                  <a:pt x="616392" y="15514"/>
-                </a:lnTo>
-                <a:lnTo>
-                  <a:pt x="490488" y="61460"/>
-                </a:lnTo>
-                <a:lnTo>
-                  <a:pt x="372938" y="136048"/>
-                </a:lnTo>
-                <a:lnTo>
-                  <a:pt x="266725" y="237487"/>
-                </a:lnTo>
-                <a:lnTo>
-                  <a:pt x="174237" y="362197"/>
-                </a:lnTo>
-                <a:lnTo>
-                  <a:pt x="99649" y="507195"/>
-                </a:lnTo>
-                <a:lnTo>
-                  <a:pt x="44753" y="667708"/>
-                </a:lnTo>
-                <a:lnTo>
-                  <a:pt x="11337" y="838364"/>
-                </a:lnTo>
-                <a:lnTo>
-                  <a:pt x="0" y="1014391"/>
-                </a:lnTo>
-                <a:lnTo>
-                  <a:pt x="11337" y="1190417"/>
-                </a:lnTo>
-                <a:lnTo>
-                  <a:pt x="44753" y="1361074"/>
-                </a:lnTo>
-                <a:lnTo>
-                  <a:pt x="99649" y="1521586"/>
-                </a:lnTo>
-                <a:lnTo>
-                  <a:pt x="174237" y="1666584"/>
-                </a:lnTo>
-                <a:lnTo>
-                  <a:pt x="266725" y="1791295"/>
-                </a:lnTo>
-                <a:lnTo>
-                  <a:pt x="372938" y="1892734"/>
-                </a:lnTo>
-                <a:lnTo>
-                  <a:pt x="490488" y="1967321"/>
-                </a:lnTo>
-                <a:lnTo>
-                  <a:pt x="616392" y="2013267"/>
-                </a:lnTo>
-                <a:lnTo>
-                  <a:pt x="745876" y="2028782"/>
-                </a:lnTo>
-                <a:lnTo>
-                  <a:pt x="1097929" y="2013267"/>
-                </a:lnTo>
-                <a:lnTo>
-                  <a:pt x="1439838" y="1967321"/>
-                </a:lnTo>
-                <a:lnTo>
-                  <a:pt x="1760266" y="1892734"/>
-                </a:lnTo>
-                <a:lnTo>
-                  <a:pt x="2049666" y="1791295"/>
-                </a:lnTo>
-                <a:lnTo>
-                  <a:pt x="2300280" y="1666584"/>
-                </a:lnTo>
-                <a:lnTo>
-                  <a:pt x="2502562" y="1521586"/>
-                </a:lnTo>
-                <a:lnTo>
-                  <a:pt x="2652334" y="1361074"/>
-                </a:lnTo>
-                <a:lnTo>
-                  <a:pt x="2743629" y="1190417"/>
+                  <a:pt x="2595627" y="793140"/>
+                </a:lnTo>
+                <a:lnTo>
+                  <a:pt x="2509256" y="631689"/>
+                </a:lnTo>
+                <a:lnTo>
+                  <a:pt x="2367564" y="479835"/>
+                </a:lnTo>
+                <a:lnTo>
+                  <a:pt x="2176194" y="342659"/>
+                </a:lnTo>
+                <a:lnTo>
+                  <a:pt x="1939099" y="224676"/>
+                </a:lnTo>
+                <a:lnTo>
+                  <a:pt x="1665311" y="128709"/>
+                </a:lnTo>
+                <a:lnTo>
+                  <a:pt x="1362168" y="58145"/>
+                </a:lnTo>
+                <a:lnTo>
+                  <a:pt x="1038702" y="14677"/>
+                </a:lnTo>
+                <a:lnTo>
+                  <a:pt x="705640" y="0"/>
+                </a:lnTo>
+                <a:lnTo>
+                  <a:pt x="583141" y="14677"/>
+                </a:lnTo>
+                <a:lnTo>
+                  <a:pt x="464029" y="58145"/>
+                </a:lnTo>
+                <a:lnTo>
+                  <a:pt x="352820" y="128709"/>
+                </a:lnTo>
+                <a:lnTo>
+                  <a:pt x="252337" y="224676"/>
+                </a:lnTo>
+                <a:lnTo>
+                  <a:pt x="164838" y="342659"/>
+                </a:lnTo>
+                <a:lnTo>
+                  <a:pt x="94274" y="479835"/>
+                </a:lnTo>
+                <a:lnTo>
+                  <a:pt x="42338" y="631689"/>
+                </a:lnTo>
+                <a:lnTo>
+                  <a:pt x="10726" y="793140"/>
+                </a:lnTo>
+                <a:lnTo>
+                  <a:pt x="0" y="959671"/>
+                </a:lnTo>
+                <a:lnTo>
+                  <a:pt x="10726" y="1126202"/>
+                </a:lnTo>
+                <a:lnTo>
+                  <a:pt x="42338" y="1287652"/>
+                </a:lnTo>
+                <a:lnTo>
+                  <a:pt x="94274" y="1439506"/>
+                </a:lnTo>
+                <a:lnTo>
+                  <a:pt x="164838" y="1576682"/>
+                </a:lnTo>
+                <a:lnTo>
+                  <a:pt x="252337" y="1694665"/>
+                </a:lnTo>
+                <a:lnTo>
+                  <a:pt x="352820" y="1790632"/>
+                </a:lnTo>
+                <a:lnTo>
+                  <a:pt x="464029" y="1861196"/>
+                </a:lnTo>
+                <a:lnTo>
+                  <a:pt x="583141" y="1904664"/>
+                </a:lnTo>
+                <a:lnTo>
+                  <a:pt x="705640" y="1919341"/>
+                </a:lnTo>
+                <a:lnTo>
+                  <a:pt x="1038702" y="1904664"/>
+                </a:lnTo>
+                <a:lnTo>
+                  <a:pt x="1362168" y="1861196"/>
+                </a:lnTo>
+                <a:lnTo>
+                  <a:pt x="1665311" y="1790632"/>
+                </a:lnTo>
+                <a:lnTo>
+                  <a:pt x="1939099" y="1694665"/>
+                </a:lnTo>
+                <a:lnTo>
+                  <a:pt x="2176194" y="1576682"/>
+                </a:lnTo>
+                <a:lnTo>
+                  <a:pt x="2367564" y="1439506"/>
+                </a:lnTo>
+                <a:lnTo>
+                  <a:pt x="2509256" y="1287652"/>
+                </a:lnTo>
+                <a:lnTo>
+                  <a:pt x="2595627" y="1126202"/>
                 </a:lnTo>
                 <a:close/>
               </a:path>
@@ -8994,8 +8994,8 @@
         </p:nvSpPr>
         <p:spPr>
           <a:xfrm>
-            <a:off x="8189090" y="3058246"/>
-            <a:ext cx="1432081" cy="1074061"/>
+            <a:off x="8230613" y="3223759"/>
+            <a:ext cx="1354829" cy="1016122"/>
           </a:xfrm>
           <a:custGeom>
             <a:avLst/>
@@ -9004,114 +9004,114 @@
             <a:cxnLst/>
             <a:rect l="l" t="t" r="r" b="b"/>
             <a:pathLst>
-              <a:path w="1432081" h="1074061">
+              <a:path w="1354829" h="1016122">
                 <a:moveTo>
-                  <a:pt x="1432081" y="537030"/>
+                  <a:pt x="1354829" y="508061"/>
                 </a:moveTo>
                 <a:lnTo>
-                  <a:pt x="1415970" y="443945"/>
-                </a:lnTo>
-                <a:lnTo>
-                  <a:pt x="1367041" y="353247"/>
-                </a:lnTo>
-                <a:lnTo>
-                  <a:pt x="1288276" y="268515"/>
-                </a:lnTo>
-                <a:lnTo>
-                  <a:pt x="1180870" y="191541"/>
-                </a:lnTo>
-                <a:lnTo>
-                  <a:pt x="1048403" y="125904"/>
-                </a:lnTo>
-                <a:lnTo>
-                  <a:pt x="895051" y="72201"/>
-                </a:lnTo>
-                <a:lnTo>
-                  <a:pt x="725588" y="32222"/>
-                </a:lnTo>
-                <a:lnTo>
-                  <a:pt x="544788" y="8354"/>
-                </a:lnTo>
-                <a:lnTo>
-                  <a:pt x="358020" y="0"/>
-                </a:lnTo>
-                <a:lnTo>
-                  <a:pt x="295963" y="8354"/>
-                </a:lnTo>
-                <a:lnTo>
-                  <a:pt x="235697" y="32222"/>
-                </a:lnTo>
-                <a:lnTo>
-                  <a:pt x="179010" y="72201"/>
-                </a:lnTo>
-                <a:lnTo>
-                  <a:pt x="127694" y="125904"/>
-                </a:lnTo>
-                <a:lnTo>
-                  <a:pt x="83538" y="191541"/>
-                </a:lnTo>
-                <a:lnTo>
-                  <a:pt x="47736" y="268515"/>
-                </a:lnTo>
-                <a:lnTo>
-                  <a:pt x="21481" y="353247"/>
-                </a:lnTo>
-                <a:lnTo>
-                  <a:pt x="5370" y="443945"/>
-                </a:lnTo>
-                <a:lnTo>
-                  <a:pt x="0" y="537030"/>
-                </a:lnTo>
-                <a:lnTo>
-                  <a:pt x="5370" y="630116"/>
-                </a:lnTo>
-                <a:lnTo>
-                  <a:pt x="21481" y="720814"/>
-                </a:lnTo>
-                <a:lnTo>
-                  <a:pt x="47736" y="805546"/>
-                </a:lnTo>
-                <a:lnTo>
-                  <a:pt x="83538" y="882520"/>
-                </a:lnTo>
-                <a:lnTo>
-                  <a:pt x="127694" y="948157"/>
-                </a:lnTo>
-                <a:lnTo>
-                  <a:pt x="179010" y="1001860"/>
-                </a:lnTo>
-                <a:lnTo>
-                  <a:pt x="235697" y="1041839"/>
-                </a:lnTo>
-                <a:lnTo>
-                  <a:pt x="295963" y="1065707"/>
-                </a:lnTo>
-                <a:lnTo>
-                  <a:pt x="358020" y="1074061"/>
-                </a:lnTo>
-                <a:lnTo>
-                  <a:pt x="544788" y="1065707"/>
-                </a:lnTo>
-                <a:lnTo>
-                  <a:pt x="725588" y="1041839"/>
-                </a:lnTo>
-                <a:lnTo>
-                  <a:pt x="895051" y="1001860"/>
-                </a:lnTo>
-                <a:lnTo>
-                  <a:pt x="1048403" y="948157"/>
-                </a:lnTo>
-                <a:lnTo>
-                  <a:pt x="1180870" y="882520"/>
-                </a:lnTo>
-                <a:lnTo>
-                  <a:pt x="1288276" y="805546"/>
-                </a:lnTo>
-                <a:lnTo>
-                  <a:pt x="1367041" y="720814"/>
-                </a:lnTo>
-                <a:lnTo>
-                  <a:pt x="1415970" y="630116"/>
+                  <a:pt x="1339587" y="419997"/>
+                </a:lnTo>
+                <a:lnTo>
+                  <a:pt x="1293297" y="334191"/>
+                </a:lnTo>
+                <a:lnTo>
+                  <a:pt x="1218782" y="254030"/>
+                </a:lnTo>
+                <a:lnTo>
+                  <a:pt x="1117169" y="181208"/>
+                </a:lnTo>
+                <a:lnTo>
+                  <a:pt x="991848" y="119112"/>
+                </a:lnTo>
+                <a:lnTo>
+                  <a:pt x="846768" y="68306"/>
+                </a:lnTo>
+                <a:lnTo>
+                  <a:pt x="686447" y="30484"/>
+                </a:lnTo>
+                <a:lnTo>
+                  <a:pt x="515400" y="7903"/>
+                </a:lnTo>
+                <a:lnTo>
+                  <a:pt x="338707" y="0"/>
+                </a:lnTo>
+                <a:lnTo>
+                  <a:pt x="279998" y="7903"/>
+                </a:lnTo>
+                <a:lnTo>
+                  <a:pt x="222982" y="30484"/>
+                </a:lnTo>
+                <a:lnTo>
+                  <a:pt x="169354" y="68306"/>
+                </a:lnTo>
+                <a:lnTo>
+                  <a:pt x="120806" y="119112"/>
+                </a:lnTo>
+                <a:lnTo>
+                  <a:pt x="79032" y="181208"/>
+                </a:lnTo>
+                <a:lnTo>
+                  <a:pt x="45161" y="254030"/>
+                </a:lnTo>
+                <a:lnTo>
+                  <a:pt x="20322" y="334191"/>
+                </a:lnTo>
+                <a:lnTo>
+                  <a:pt x="5081" y="419997"/>
+                </a:lnTo>
+                <a:lnTo>
+                  <a:pt x="0" y="508061"/>
+                </a:lnTo>
+                <a:lnTo>
+                  <a:pt x="5081" y="596125"/>
+                </a:lnTo>
+                <a:lnTo>
+                  <a:pt x="20322" y="681931"/>
+                </a:lnTo>
+                <a:lnTo>
+                  <a:pt x="45161" y="762091"/>
+                </a:lnTo>
+                <a:lnTo>
+                  <a:pt x="79032" y="834913"/>
+                </a:lnTo>
+                <a:lnTo>
+                  <a:pt x="120806" y="897010"/>
+                </a:lnTo>
+                <a:lnTo>
+                  <a:pt x="169354" y="947816"/>
+                </a:lnTo>
+                <a:lnTo>
+                  <a:pt x="222982" y="985638"/>
+                </a:lnTo>
+                <a:lnTo>
+                  <a:pt x="279998" y="1008219"/>
+                </a:lnTo>
+                <a:lnTo>
+                  <a:pt x="338707" y="1016122"/>
+                </a:lnTo>
+                <a:lnTo>
+                  <a:pt x="515400" y="1008219"/>
+                </a:lnTo>
+                <a:lnTo>
+                  <a:pt x="686447" y="985638"/>
+                </a:lnTo>
+                <a:lnTo>
+                  <a:pt x="846768" y="947816"/>
+                </a:lnTo>
+                <a:lnTo>
+                  <a:pt x="991848" y="897010"/>
+                </a:lnTo>
+                <a:lnTo>
+                  <a:pt x="1117169" y="834913"/>
+                </a:lnTo>
+                <a:lnTo>
+                  <a:pt x="1218782" y="762091"/>
+                </a:lnTo>
+                <a:lnTo>
+                  <a:pt x="1293297" y="681931"/>
+                </a:lnTo>
+                <a:lnTo>
+                  <a:pt x="1339587" y="596125"/>
                 </a:lnTo>
                 <a:close/>
               </a:path>
@@ -9136,8 +9136,8 @@
         </p:nvSpPr>
         <p:spPr>
           <a:xfrm>
-            <a:off x="8399726" y="3457439"/>
-            <a:ext cx="294770" cy="255984"/>
+            <a:off x="8429886" y="3601417"/>
+            <a:ext cx="278869" cy="242176"/>
           </a:xfrm>
           <a:custGeom>
             <a:avLst/>
@@ -9146,15 +9146,15 @@
             <a:cxnLst/>
             <a:rect l="l" t="t" r="r" b="b"/>
             <a:pathLst>
-              <a:path w="294770" h="255984">
+              <a:path w="278869" h="242176">
                 <a:moveTo>
-                  <a:pt x="0" y="255984"/>
+                  <a:pt x="0" y="242176"/>
                 </a:moveTo>
                 <a:lnTo>
-                  <a:pt x="294770" y="255984"/>
-                </a:lnTo>
-                <a:lnTo>
-                  <a:pt x="147385" y="0"/>
+                  <a:pt x="278869" y="242176"/>
+                </a:lnTo>
+                <a:lnTo>
+                  <a:pt x="139434" y="0"/>
                 </a:lnTo>
                 <a:close/>
               </a:path>
@@ -9179,8 +9179,8 @@
         </p:nvSpPr>
         <p:spPr>
           <a:xfrm>
-            <a:off x="8353780" y="5696856"/>
-            <a:ext cx="386662" cy="429624"/>
+            <a:off x="8386419" y="5720031"/>
+            <a:ext cx="365804" cy="406449"/>
           </a:xfrm>
           <a:custGeom>
             <a:avLst/>
@@ -9189,21 +9189,21 @@
             <a:cxnLst/>
             <a:rect l="l" t="t" r="r" b="b"/>
             <a:pathLst>
-              <a:path w="386662" h="429624">
+              <a:path w="365804" h="406449">
                 <a:moveTo>
-                  <a:pt x="0" y="429624"/>
+                  <a:pt x="0" y="406449"/>
                 </a:moveTo>
                 <a:lnTo>
-                  <a:pt x="386662" y="429624"/>
-                </a:lnTo>
-                <a:lnTo>
-                  <a:pt x="386662" y="182590"/>
-                </a:lnTo>
-                <a:lnTo>
-                  <a:pt x="193331" y="0"/>
-                </a:lnTo>
-                <a:lnTo>
-                  <a:pt x="0" y="182590"/>
+                  <a:pt x="365804" y="406449"/>
+                </a:lnTo>
+                <a:lnTo>
+                  <a:pt x="365804" y="172741"/>
+                </a:lnTo>
+                <a:lnTo>
+                  <a:pt x="182902" y="0"/>
+                </a:lnTo>
+                <a:lnTo>
+                  <a:pt x="0" y="172741"/>
                 </a:lnTo>
                 <a:close/>
               </a:path>
@@ -9228,8 +9228,8 @@
         </p:nvSpPr>
         <p:spPr>
           <a:xfrm flipV="1">
-            <a:off x="6637669" y="1745505"/>
-            <a:ext cx="0" cy="716041"/>
+            <a:off x="6762882" y="1981832"/>
+            <a:ext cx="0" cy="677415"/>
           </a:xfrm>
           <a:prstGeom prst="line">
             <a:avLst/>
@@ -9252,8 +9252,8 @@
         </p:nvSpPr>
         <p:spPr>
           <a:xfrm>
-            <a:off x="6387055" y="2103526"/>
-            <a:ext cx="501228" cy="0"/>
+            <a:off x="6525787" y="2320539"/>
+            <a:ext cx="474190" cy="0"/>
           </a:xfrm>
           <a:prstGeom prst="line">
             <a:avLst/>
@@ -9275,7 +9275,7 @@
         </p:nvSpPr>
         <p:spPr>
           <a:xfrm>
-            <a:off x="10680300" y="2587208"/>
+            <a:off x="10570666" y="2769909"/>
             <a:ext cx="621792" cy="304800"/>
           </a:xfrm>
           <a:prstGeom prst="rect">
@@ -9295,7 +9295,7 @@
         </p:nvSpPr>
         <p:spPr>
           <a:xfrm>
-            <a:off x="10634580" y="2549108"/>
+            <a:off x="10524946" y="2731809"/>
             <a:ext cx="713232" cy="381000"/>
           </a:xfrm>
           <a:prstGeom prst="rect">
@@ -9334,7 +9334,7 @@
         </p:nvSpPr>
         <p:spPr>
           <a:xfrm>
-            <a:off x="9898025" y="2861094"/>
+            <a:off x="9830591" y="3029020"/>
             <a:ext cx="621792" cy="304800"/>
           </a:xfrm>
           <a:prstGeom prst="rect">
@@ -9354,7 +9354,7 @@
         </p:nvSpPr>
         <p:spPr>
           <a:xfrm>
-            <a:off x="9852305" y="2822994"/>
+            <a:off x="9784871" y="2990920"/>
             <a:ext cx="713232" cy="381000"/>
           </a:xfrm>
           <a:prstGeom prst="rect">
@@ -9393,7 +9393,7 @@
         </p:nvSpPr>
         <p:spPr>
           <a:xfrm>
-            <a:off x="9115751" y="3134979"/>
+            <a:off x="9090515" y="3288131"/>
             <a:ext cx="621792" cy="304800"/>
           </a:xfrm>
           <a:prstGeom prst="rect">
@@ -9413,7 +9413,7 @@
         </p:nvSpPr>
         <p:spPr>
           <a:xfrm>
-            <a:off x="9070031" y="3096879"/>
+            <a:off x="9044795" y="3250031"/>
             <a:ext cx="713232" cy="381000"/>
           </a:xfrm>
           <a:prstGeom prst="rect">
@@ -9452,7 +9452,7 @@
         </p:nvSpPr>
         <p:spPr>
           <a:xfrm>
-            <a:off x="9028923" y="5731908"/>
+            <a:off x="9006070" y="5742917"/>
             <a:ext cx="707136" cy="381000"/>
           </a:xfrm>
           <a:prstGeom prst="rect">
@@ -9491,7 +9491,7 @@
         </p:nvSpPr>
         <p:spPr>
           <a:xfrm>
-            <a:off x="6433453" y="1226820"/>
+            <a:off x="6558666" y="1480850"/>
             <a:ext cx="408432" cy="381000"/>
           </a:xfrm>
           <a:prstGeom prst="rect">
@@ -24284,8 +24284,8 @@
         </p:nvSpPr>
         <p:spPr>
           <a:xfrm>
-            <a:off x="1635453" y="1733018"/>
-            <a:ext cx="4261921" cy="2209885"/>
+            <a:off x="1830160" y="1919312"/>
+            <a:ext cx="3872507" cy="2007967"/>
           </a:xfrm>
           <a:custGeom>
             <a:avLst/>
@@ -24294,114 +24294,114 @@
             <a:cxnLst/>
             <a:rect l="l" t="t" r="r" b="b"/>
             <a:pathLst>
-              <a:path w="4261921" h="2209885">
+              <a:path w="3872507" h="2007967">
                 <a:moveTo>
-                  <a:pt x="4261921" y="1104943"/>
+                  <a:pt x="3872507" y="1003983"/>
                 </a:moveTo>
                 <a:lnTo>
-                  <a:pt x="4245084" y="912893"/>
-                </a:lnTo>
-                <a:lnTo>
-                  <a:pt x="4195099" y="727157"/>
-                </a:lnTo>
-                <a:lnTo>
-                  <a:pt x="4114070" y="552471"/>
-                </a:lnTo>
-                <a:lnTo>
-                  <a:pt x="4003575" y="394622"/>
-                </a:lnTo>
-                <a:lnTo>
-                  <a:pt x="3867299" y="258346"/>
-                </a:lnTo>
-                <a:lnTo>
-                  <a:pt x="3709450" y="147852"/>
-                </a:lnTo>
-                <a:lnTo>
-                  <a:pt x="3534764" y="66823"/>
-                </a:lnTo>
-                <a:lnTo>
-                  <a:pt x="3349028" y="16837"/>
-                </a:lnTo>
-                <a:lnTo>
-                  <a:pt x="3156979" y="0"/>
-                </a:lnTo>
-                <a:lnTo>
-                  <a:pt x="2608717" y="16837"/>
-                </a:lnTo>
-                <a:lnTo>
-                  <a:pt x="2077292" y="66823"/>
-                </a:lnTo>
-                <a:lnTo>
-                  <a:pt x="1578489" y="147852"/>
-                </a:lnTo>
-                <a:lnTo>
-                  <a:pt x="1127568" y="258346"/>
-                </a:lnTo>
-                <a:lnTo>
-                  <a:pt x="738733" y="394622"/>
-                </a:lnTo>
-                <a:lnTo>
-                  <a:pt x="423035" y="552471"/>
-                </a:lnTo>
-                <a:lnTo>
-                  <a:pt x="190471" y="727157"/>
-                </a:lnTo>
-                <a:lnTo>
-                  <a:pt x="47881" y="912893"/>
-                </a:lnTo>
-                <a:lnTo>
-                  <a:pt x="0" y="1104943"/>
-                </a:lnTo>
-                <a:lnTo>
-                  <a:pt x="47881" y="1296992"/>
-                </a:lnTo>
-                <a:lnTo>
-                  <a:pt x="190471" y="1482728"/>
-                </a:lnTo>
-                <a:lnTo>
-                  <a:pt x="423035" y="1657414"/>
-                </a:lnTo>
-                <a:lnTo>
-                  <a:pt x="738733" y="1815263"/>
-                </a:lnTo>
-                <a:lnTo>
-                  <a:pt x="1127568" y="1951539"/>
-                </a:lnTo>
-                <a:lnTo>
-                  <a:pt x="1578489" y="2062033"/>
-                </a:lnTo>
-                <a:lnTo>
-                  <a:pt x="2077292" y="2143062"/>
-                </a:lnTo>
-                <a:lnTo>
-                  <a:pt x="2608717" y="2193048"/>
-                </a:lnTo>
-                <a:lnTo>
-                  <a:pt x="3156979" y="2209885"/>
-                </a:lnTo>
-                <a:lnTo>
-                  <a:pt x="3349028" y="2193048"/>
-                </a:lnTo>
-                <a:lnTo>
-                  <a:pt x="3534764" y="2143062"/>
-                </a:lnTo>
-                <a:lnTo>
-                  <a:pt x="3709450" y="2062033"/>
-                </a:lnTo>
-                <a:lnTo>
-                  <a:pt x="3867299" y="1951539"/>
-                </a:lnTo>
-                <a:lnTo>
-                  <a:pt x="4003575" y="1815263"/>
-                </a:lnTo>
-                <a:lnTo>
-                  <a:pt x="4114070" y="1657414"/>
-                </a:lnTo>
-                <a:lnTo>
-                  <a:pt x="4195099" y="1482728"/>
-                </a:lnTo>
-                <a:lnTo>
-                  <a:pt x="4245084" y="1296992"/>
+                  <a:pt x="3857208" y="829481"/>
+                </a:lnTo>
+                <a:lnTo>
+                  <a:pt x="3811790" y="660717"/>
+                </a:lnTo>
+                <a:lnTo>
+                  <a:pt x="3738165" y="501992"/>
+                </a:lnTo>
+                <a:lnTo>
+                  <a:pt x="3637766" y="358565"/>
+                </a:lnTo>
+                <a:lnTo>
+                  <a:pt x="3513942" y="234741"/>
+                </a:lnTo>
+                <a:lnTo>
+                  <a:pt x="3370516" y="134343"/>
+                </a:lnTo>
+                <a:lnTo>
+                  <a:pt x="3211791" y="60717"/>
+                </a:lnTo>
+                <a:lnTo>
+                  <a:pt x="3043026" y="15299"/>
+                </a:lnTo>
+                <a:lnTo>
+                  <a:pt x="2868524" y="0"/>
+                </a:lnTo>
+                <a:lnTo>
+                  <a:pt x="2370357" y="15299"/>
+                </a:lnTo>
+                <a:lnTo>
+                  <a:pt x="1887489" y="60717"/>
+                </a:lnTo>
+                <a:lnTo>
+                  <a:pt x="1434262" y="134343"/>
+                </a:lnTo>
+                <a:lnTo>
+                  <a:pt x="1024541" y="234741"/>
+                </a:lnTo>
+                <a:lnTo>
+                  <a:pt x="671235" y="358565"/>
+                </a:lnTo>
+                <a:lnTo>
+                  <a:pt x="384382" y="501992"/>
+                </a:lnTo>
+                <a:lnTo>
+                  <a:pt x="173068" y="660717"/>
+                </a:lnTo>
+                <a:lnTo>
+                  <a:pt x="43506" y="829481"/>
+                </a:lnTo>
+                <a:lnTo>
+                  <a:pt x="0" y="1003983"/>
+                </a:lnTo>
+                <a:lnTo>
+                  <a:pt x="43506" y="1178485"/>
+                </a:lnTo>
+                <a:lnTo>
+                  <a:pt x="173068" y="1347250"/>
+                </a:lnTo>
+                <a:lnTo>
+                  <a:pt x="384382" y="1505975"/>
+                </a:lnTo>
+                <a:lnTo>
+                  <a:pt x="671235" y="1649401"/>
+                </a:lnTo>
+                <a:lnTo>
+                  <a:pt x="1024541" y="1773226"/>
+                </a:lnTo>
+                <a:lnTo>
+                  <a:pt x="1434262" y="1873624"/>
+                </a:lnTo>
+                <a:lnTo>
+                  <a:pt x="1887489" y="1947250"/>
+                </a:lnTo>
+                <a:lnTo>
+                  <a:pt x="2370357" y="1992668"/>
+                </a:lnTo>
+                <a:lnTo>
+                  <a:pt x="2868524" y="2007967"/>
+                </a:lnTo>
+                <a:lnTo>
+                  <a:pt x="3043026" y="1992668"/>
+                </a:lnTo>
+                <a:lnTo>
+                  <a:pt x="3211791" y="1947250"/>
+                </a:lnTo>
+                <a:lnTo>
+                  <a:pt x="3370516" y="1873624"/>
+                </a:lnTo>
+                <a:lnTo>
+                  <a:pt x="3513942" y="1773226"/>
+                </a:lnTo>
+                <a:lnTo>
+                  <a:pt x="3637766" y="1649401"/>
+                </a:lnTo>
+                <a:lnTo>
+                  <a:pt x="3738165" y="1505975"/>
+                </a:lnTo>
+                <a:lnTo>
+                  <a:pt x="3811790" y="1347250"/>
+                </a:lnTo>
+                <a:lnTo>
+                  <a:pt x="3857208" y="1178485"/>
                 </a:lnTo>
                 <a:close/>
               </a:path>
@@ -24426,8 +24426,8 @@
         </p:nvSpPr>
         <p:spPr>
           <a:xfrm>
-            <a:off x="2898244" y="2048716"/>
-            <a:ext cx="2683432" cy="1578489"/>
+            <a:off x="2977570" y="2206164"/>
+            <a:ext cx="2438245" cy="1434262"/>
           </a:xfrm>
           <a:custGeom>
             <a:avLst/>
@@ -24436,114 +24436,114 @@
             <a:cxnLst/>
             <a:rect l="l" t="t" r="r" b="b"/>
             <a:pathLst>
-              <a:path w="2683432" h="1578489">
+              <a:path w="2438245" h="1434262">
                 <a:moveTo>
-                  <a:pt x="2683432" y="789245"/>
+                  <a:pt x="2438245" y="717131"/>
                 </a:moveTo>
                 <a:lnTo>
-                  <a:pt x="2671330" y="652442"/>
-                </a:lnTo>
-                <a:lnTo>
-                  <a:pt x="2636077" y="519323"/>
-                </a:lnTo>
-                <a:lnTo>
-                  <a:pt x="2577673" y="394622"/>
-                </a:lnTo>
-                <a:lnTo>
-                  <a:pt x="2498749" y="282023"/>
-                </a:lnTo>
-                <a:lnTo>
-                  <a:pt x="2401409" y="184683"/>
-                </a:lnTo>
-                <a:lnTo>
-                  <a:pt x="2288810" y="105759"/>
-                </a:lnTo>
-                <a:lnTo>
-                  <a:pt x="2164109" y="47355"/>
-                </a:lnTo>
-                <a:lnTo>
-                  <a:pt x="2030990" y="12102"/>
-                </a:lnTo>
-                <a:lnTo>
-                  <a:pt x="1894187" y="0"/>
-                </a:lnTo>
-                <a:lnTo>
-                  <a:pt x="1565335" y="12102"/>
-                </a:lnTo>
-                <a:lnTo>
-                  <a:pt x="1246480" y="47355"/>
-                </a:lnTo>
-                <a:lnTo>
-                  <a:pt x="947094" y="105759"/>
-                </a:lnTo>
-                <a:lnTo>
-                  <a:pt x="676646" y="184683"/>
-                </a:lnTo>
-                <a:lnTo>
-                  <a:pt x="443029" y="282023"/>
-                </a:lnTo>
-                <a:lnTo>
-                  <a:pt x="253611" y="394622"/>
-                </a:lnTo>
-                <a:lnTo>
-                  <a:pt x="114177" y="519323"/>
-                </a:lnTo>
-                <a:lnTo>
-                  <a:pt x="28939" y="652442"/>
-                </a:lnTo>
-                <a:lnTo>
-                  <a:pt x="0" y="789245"/>
-                </a:lnTo>
-                <a:lnTo>
-                  <a:pt x="28939" y="926047"/>
-                </a:lnTo>
-                <a:lnTo>
-                  <a:pt x="114177" y="1059166"/>
-                </a:lnTo>
-                <a:lnTo>
-                  <a:pt x="253611" y="1183867"/>
-                </a:lnTo>
-                <a:lnTo>
-                  <a:pt x="443029" y="1296466"/>
-                </a:lnTo>
-                <a:lnTo>
-                  <a:pt x="676646" y="1393806"/>
-                </a:lnTo>
-                <a:lnTo>
-                  <a:pt x="947094" y="1472731"/>
-                </a:lnTo>
-                <a:lnTo>
-                  <a:pt x="1246480" y="1531135"/>
-                </a:lnTo>
-                <a:lnTo>
-                  <a:pt x="1565335" y="1566388"/>
-                </a:lnTo>
-                <a:lnTo>
-                  <a:pt x="1894187" y="1578489"/>
-                </a:lnTo>
-                <a:lnTo>
-                  <a:pt x="2030990" y="1566388"/>
-                </a:lnTo>
-                <a:lnTo>
-                  <a:pt x="2164109" y="1531135"/>
-                </a:lnTo>
-                <a:lnTo>
-                  <a:pt x="2288810" y="1472731"/>
-                </a:lnTo>
-                <a:lnTo>
-                  <a:pt x="2401409" y="1393806"/>
-                </a:lnTo>
-                <a:lnTo>
-                  <a:pt x="2498749" y="1296466"/>
-                </a:lnTo>
-                <a:lnTo>
-                  <a:pt x="2577673" y="1183867"/>
-                </a:lnTo>
-                <a:lnTo>
-                  <a:pt x="2636077" y="1059166"/>
-                </a:lnTo>
-                <a:lnTo>
-                  <a:pt x="2671330" y="926047"/>
+                  <a:pt x="2427249" y="592828"/>
+                </a:lnTo>
+                <a:lnTo>
+                  <a:pt x="2395217" y="471872"/>
+                </a:lnTo>
+                <a:lnTo>
+                  <a:pt x="2342150" y="358565"/>
+                </a:lnTo>
+                <a:lnTo>
+                  <a:pt x="2270437" y="256255"/>
+                </a:lnTo>
+                <a:lnTo>
+                  <a:pt x="2181990" y="167809"/>
+                </a:lnTo>
+                <a:lnTo>
+                  <a:pt x="2079680" y="96096"/>
+                </a:lnTo>
+                <a:lnTo>
+                  <a:pt x="1966373" y="43028"/>
+                </a:lnTo>
+                <a:lnTo>
+                  <a:pt x="1845417" y="10996"/>
+                </a:lnTo>
+                <a:lnTo>
+                  <a:pt x="1721114" y="0"/>
+                </a:lnTo>
+                <a:lnTo>
+                  <a:pt x="1422310" y="10996"/>
+                </a:lnTo>
+                <a:lnTo>
+                  <a:pt x="1132589" y="43028"/>
+                </a:lnTo>
+                <a:lnTo>
+                  <a:pt x="860557" y="96096"/>
+                </a:lnTo>
+                <a:lnTo>
+                  <a:pt x="614820" y="167809"/>
+                </a:lnTo>
+                <a:lnTo>
+                  <a:pt x="402550" y="256255"/>
+                </a:lnTo>
+                <a:lnTo>
+                  <a:pt x="230438" y="358565"/>
+                </a:lnTo>
+                <a:lnTo>
+                  <a:pt x="103745" y="471872"/>
+                </a:lnTo>
+                <a:lnTo>
+                  <a:pt x="26295" y="592828"/>
+                </a:lnTo>
+                <a:lnTo>
+                  <a:pt x="0" y="717131"/>
+                </a:lnTo>
+                <a:lnTo>
+                  <a:pt x="26295" y="841434"/>
+                </a:lnTo>
+                <a:lnTo>
+                  <a:pt x="103745" y="962390"/>
+                </a:lnTo>
+                <a:lnTo>
+                  <a:pt x="230438" y="1075696"/>
+                </a:lnTo>
+                <a:lnTo>
+                  <a:pt x="402550" y="1178007"/>
+                </a:lnTo>
+                <a:lnTo>
+                  <a:pt x="614820" y="1266453"/>
+                </a:lnTo>
+                <a:lnTo>
+                  <a:pt x="860557" y="1338166"/>
+                </a:lnTo>
+                <a:lnTo>
+                  <a:pt x="1132589" y="1391234"/>
+                </a:lnTo>
+                <a:lnTo>
+                  <a:pt x="1422310" y="1423266"/>
+                </a:lnTo>
+                <a:lnTo>
+                  <a:pt x="1721114" y="1434262"/>
+                </a:lnTo>
+                <a:lnTo>
+                  <a:pt x="1845417" y="1423266"/>
+                </a:lnTo>
+                <a:lnTo>
+                  <a:pt x="1966373" y="1391234"/>
+                </a:lnTo>
+                <a:lnTo>
+                  <a:pt x="2079680" y="1338166"/>
+                </a:lnTo>
+                <a:lnTo>
+                  <a:pt x="2181990" y="1266453"/>
+                </a:lnTo>
+                <a:lnTo>
+                  <a:pt x="2270437" y="1178007"/>
+                </a:lnTo>
+                <a:lnTo>
+                  <a:pt x="2342150" y="1075696"/>
+                </a:lnTo>
+                <a:lnTo>
+                  <a:pt x="2395217" y="962390"/>
+                </a:lnTo>
+                <a:lnTo>
+                  <a:pt x="2427249" y="841434"/>
                 </a:lnTo>
                 <a:close/>
               </a:path>
@@ -24568,8 +24568,8 @@
         </p:nvSpPr>
         <p:spPr>
           <a:xfrm>
-            <a:off x="4161036" y="2390722"/>
-            <a:ext cx="1104943" cy="894477"/>
+            <a:off x="4124979" y="2516921"/>
+            <a:ext cx="1003983" cy="812748"/>
           </a:xfrm>
           <a:custGeom>
             <a:avLst/>
@@ -24578,114 +24578,114 @@
             <a:cxnLst/>
             <a:rect l="l" t="t" r="r" b="b"/>
             <a:pathLst>
-              <a:path w="1104943" h="894477">
+              <a:path w="1003983" h="812748">
                 <a:moveTo>
-                  <a:pt x="1104943" y="447239"/>
+                  <a:pt x="1003983" y="406374"/>
                 </a:moveTo>
                 <a:lnTo>
-                  <a:pt x="1097576" y="369367"/>
-                </a:lnTo>
-                <a:lnTo>
-                  <a:pt x="1076530" y="294125"/>
-                </a:lnTo>
-                <a:lnTo>
-                  <a:pt x="1041277" y="223619"/>
-                </a:lnTo>
-                <a:lnTo>
-                  <a:pt x="993922" y="159954"/>
-                </a:lnTo>
-                <a:lnTo>
-                  <a:pt x="936044" y="104706"/>
-                </a:lnTo>
-                <a:lnTo>
-                  <a:pt x="868169" y="59983"/>
-                </a:lnTo>
-                <a:lnTo>
-                  <a:pt x="793454" y="26834"/>
-                </a:lnTo>
-                <a:lnTo>
-                  <a:pt x="713477" y="6840"/>
-                </a:lnTo>
-                <a:lnTo>
-                  <a:pt x="631396" y="0"/>
-                </a:lnTo>
-                <a:lnTo>
-                  <a:pt x="521954" y="6840"/>
-                </a:lnTo>
-                <a:lnTo>
-                  <a:pt x="415669" y="26834"/>
-                </a:lnTo>
-                <a:lnTo>
-                  <a:pt x="315698" y="59983"/>
-                </a:lnTo>
-                <a:lnTo>
-                  <a:pt x="225724" y="104706"/>
-                </a:lnTo>
-                <a:lnTo>
-                  <a:pt x="147852" y="159954"/>
-                </a:lnTo>
-                <a:lnTo>
-                  <a:pt x="84712" y="223619"/>
-                </a:lnTo>
-                <a:lnTo>
-                  <a:pt x="37884" y="294125"/>
-                </a:lnTo>
-                <a:lnTo>
-                  <a:pt x="9471" y="369367"/>
-                </a:lnTo>
-                <a:lnTo>
-                  <a:pt x="0" y="447239"/>
-                </a:lnTo>
-                <a:lnTo>
-                  <a:pt x="9471" y="525111"/>
-                </a:lnTo>
-                <a:lnTo>
-                  <a:pt x="37884" y="600352"/>
-                </a:lnTo>
-                <a:lnTo>
-                  <a:pt x="84712" y="670858"/>
-                </a:lnTo>
-                <a:lnTo>
-                  <a:pt x="147852" y="734524"/>
-                </a:lnTo>
-                <a:lnTo>
-                  <a:pt x="225724" y="789771"/>
-                </a:lnTo>
-                <a:lnTo>
-                  <a:pt x="315698" y="834495"/>
-                </a:lnTo>
-                <a:lnTo>
-                  <a:pt x="415669" y="867643"/>
-                </a:lnTo>
-                <a:lnTo>
-                  <a:pt x="521954" y="887637"/>
-                </a:lnTo>
-                <a:lnTo>
-                  <a:pt x="631396" y="894477"/>
-                </a:lnTo>
-                <a:lnTo>
-                  <a:pt x="713477" y="887637"/>
-                </a:lnTo>
-                <a:lnTo>
-                  <a:pt x="793454" y="867643"/>
-                </a:lnTo>
-                <a:lnTo>
-                  <a:pt x="868169" y="834495"/>
-                </a:lnTo>
-                <a:lnTo>
-                  <a:pt x="936044" y="789771"/>
-                </a:lnTo>
-                <a:lnTo>
-                  <a:pt x="993922" y="734524"/>
-                </a:lnTo>
-                <a:lnTo>
-                  <a:pt x="1041277" y="670858"/>
-                </a:lnTo>
-                <a:lnTo>
-                  <a:pt x="1076530" y="600352"/>
-                </a:lnTo>
-                <a:lnTo>
-                  <a:pt x="1097576" y="525111"/>
+                  <a:pt x="997290" y="335617"/>
+                </a:lnTo>
+                <a:lnTo>
+                  <a:pt x="978167" y="267251"/>
+                </a:lnTo>
+                <a:lnTo>
+                  <a:pt x="946135" y="203187"/>
+                </a:lnTo>
+                <a:lnTo>
+                  <a:pt x="903107" y="145339"/>
+                </a:lnTo>
+                <a:lnTo>
+                  <a:pt x="850517" y="95139"/>
+                </a:lnTo>
+                <a:lnTo>
+                  <a:pt x="788844" y="54502"/>
+                </a:lnTo>
+                <a:lnTo>
+                  <a:pt x="720956" y="24382"/>
+                </a:lnTo>
+                <a:lnTo>
+                  <a:pt x="648286" y="6215"/>
+                </a:lnTo>
+                <a:lnTo>
+                  <a:pt x="573705" y="0"/>
+                </a:lnTo>
+                <a:lnTo>
+                  <a:pt x="474263" y="6215"/>
+                </a:lnTo>
+                <a:lnTo>
+                  <a:pt x="377689" y="24382"/>
+                </a:lnTo>
+                <a:lnTo>
+                  <a:pt x="286852" y="54502"/>
+                </a:lnTo>
+                <a:lnTo>
+                  <a:pt x="205099" y="95139"/>
+                </a:lnTo>
+                <a:lnTo>
+                  <a:pt x="134343" y="145339"/>
+                </a:lnTo>
+                <a:lnTo>
+                  <a:pt x="76972" y="203187"/>
+                </a:lnTo>
+                <a:lnTo>
+                  <a:pt x="34422" y="267251"/>
+                </a:lnTo>
+                <a:lnTo>
+                  <a:pt x="8606" y="335617"/>
+                </a:lnTo>
+                <a:lnTo>
+                  <a:pt x="0" y="406374"/>
+                </a:lnTo>
+                <a:lnTo>
+                  <a:pt x="8606" y="477131"/>
+                </a:lnTo>
+                <a:lnTo>
+                  <a:pt x="34422" y="545498"/>
+                </a:lnTo>
+                <a:lnTo>
+                  <a:pt x="76972" y="609561"/>
+                </a:lnTo>
+                <a:lnTo>
+                  <a:pt x="134343" y="667410"/>
+                </a:lnTo>
+                <a:lnTo>
+                  <a:pt x="205099" y="717609"/>
+                </a:lnTo>
+                <a:lnTo>
+                  <a:pt x="286852" y="758246"/>
+                </a:lnTo>
+                <a:lnTo>
+                  <a:pt x="377689" y="788366"/>
+                </a:lnTo>
+                <a:lnTo>
+                  <a:pt x="474263" y="806533"/>
+                </a:lnTo>
+                <a:lnTo>
+                  <a:pt x="573705" y="812748"/>
+                </a:lnTo>
+                <a:lnTo>
+                  <a:pt x="648286" y="806533"/>
+                </a:lnTo>
+                <a:lnTo>
+                  <a:pt x="720956" y="788366"/>
+                </a:lnTo>
+                <a:lnTo>
+                  <a:pt x="788844" y="758246"/>
+                </a:lnTo>
+                <a:lnTo>
+                  <a:pt x="850517" y="717609"/>
+                </a:lnTo>
+                <a:lnTo>
+                  <a:pt x="903107" y="667410"/>
+                </a:lnTo>
+                <a:lnTo>
+                  <a:pt x="946135" y="609561"/>
+                </a:lnTo>
+                <a:lnTo>
+                  <a:pt x="978167" y="545498"/>
+                </a:lnTo>
+                <a:lnTo>
+                  <a:pt x="997290" y="477131"/>
                 </a:lnTo>
                 <a:close/>
               </a:path>
@@ -24710,8 +24710,8 @@
         </p:nvSpPr>
         <p:spPr>
           <a:xfrm>
-            <a:off x="4650368" y="2705367"/>
-            <a:ext cx="284128" cy="246244"/>
+            <a:off x="4569600" y="2802817"/>
+            <a:ext cx="258167" cy="223745"/>
           </a:xfrm>
           <a:custGeom>
             <a:avLst/>
@@ -24720,15 +24720,15 @@
             <a:cxnLst/>
             <a:rect l="l" t="t" r="r" b="b"/>
             <a:pathLst>
-              <a:path w="284128" h="246244">
+              <a:path w="258167" h="223745">
                 <a:moveTo>
-                  <a:pt x="0" y="246244"/>
+                  <a:pt x="0" y="223745"/>
                 </a:moveTo>
                 <a:lnTo>
-                  <a:pt x="284128" y="246244"/>
-                </a:lnTo>
-                <a:lnTo>
-                  <a:pt x="142064" y="0"/>
+                  <a:pt x="258167" y="223745"/>
+                </a:lnTo>
+                <a:lnTo>
+                  <a:pt x="129084" y="0"/>
                 </a:lnTo>
                 <a:close/>
               </a:path>
@@ -24753,8 +24753,8 @@
         </p:nvSpPr>
         <p:spPr>
           <a:xfrm>
-            <a:off x="1267139" y="4332264"/>
-            <a:ext cx="4998550" cy="1452210"/>
+            <a:off x="1495499" y="4281063"/>
+            <a:ext cx="4541829" cy="1319521"/>
           </a:xfrm>
           <a:custGeom>
             <a:avLst/>
@@ -24763,39 +24763,39 @@
             <a:cxnLst/>
             <a:rect l="l" t="t" r="r" b="b"/>
             <a:pathLst>
-              <a:path w="4998550" h="1452210">
+              <a:path w="4541829" h="1319521">
                 <a:moveTo>
-                  <a:pt x="0" y="1162821"/>
+                  <a:pt x="0" y="1056573"/>
                 </a:moveTo>
                 <a:lnTo>
-                  <a:pt x="368314" y="1031280"/>
-                </a:lnTo>
-                <a:lnTo>
-                  <a:pt x="1631106" y="610349"/>
-                </a:lnTo>
-                <a:lnTo>
-                  <a:pt x="2893897" y="189419"/>
-                </a:lnTo>
-                <a:lnTo>
-                  <a:pt x="3525293" y="0"/>
-                </a:lnTo>
-                <a:lnTo>
-                  <a:pt x="3998840" y="189419"/>
-                </a:lnTo>
-                <a:lnTo>
-                  <a:pt x="4314538" y="610349"/>
-                </a:lnTo>
-                <a:lnTo>
-                  <a:pt x="4630236" y="1031280"/>
-                </a:lnTo>
-                <a:lnTo>
-                  <a:pt x="4998550" y="1162821"/>
-                </a:lnTo>
-                <a:lnTo>
-                  <a:pt x="4998550" y="1452210"/>
-                </a:lnTo>
-                <a:lnTo>
-                  <a:pt x="0" y="1452210"/>
+                  <a:pt x="334661" y="937051"/>
+                </a:lnTo>
+                <a:lnTo>
+                  <a:pt x="1482071" y="554581"/>
+                </a:lnTo>
+                <a:lnTo>
+                  <a:pt x="2629480" y="172111"/>
+                </a:lnTo>
+                <a:lnTo>
+                  <a:pt x="3203185" y="0"/>
+                </a:lnTo>
+                <a:lnTo>
+                  <a:pt x="3633464" y="172111"/>
+                </a:lnTo>
+                <a:lnTo>
+                  <a:pt x="3920316" y="554581"/>
+                </a:lnTo>
+                <a:lnTo>
+                  <a:pt x="4207168" y="937051"/>
+                </a:lnTo>
+                <a:lnTo>
+                  <a:pt x="4541829" y="1056573"/>
+                </a:lnTo>
+                <a:lnTo>
+                  <a:pt x="4541829" y="1319521"/>
+                </a:lnTo>
+                <a:lnTo>
+                  <a:pt x="0" y="1319521"/>
                 </a:lnTo>
                 <a:close/>
               </a:path>
@@ -24820,8 +24820,8 @@
         </p:nvSpPr>
         <p:spPr>
           <a:xfrm>
-            <a:off x="1635453" y="2837960"/>
-            <a:ext cx="0" cy="2525583"/>
+            <a:off x="1830160" y="2923295"/>
+            <a:ext cx="0" cy="2294819"/>
           </a:xfrm>
           <a:prstGeom prst="line">
             <a:avLst/>
@@ -24843,8 +24843,8 @@
         </p:nvSpPr>
         <p:spPr>
           <a:xfrm>
-            <a:off x="5897374" y="2837960"/>
-            <a:ext cx="0" cy="2525583"/>
+            <a:off x="5702667" y="2923295"/>
+            <a:ext cx="0" cy="2294819"/>
           </a:xfrm>
           <a:prstGeom prst="line">
             <a:avLst/>
@@ -24866,8 +24866,8 @@
         </p:nvSpPr>
         <p:spPr>
           <a:xfrm>
-            <a:off x="2898244" y="2837960"/>
-            <a:ext cx="0" cy="2104653"/>
+            <a:off x="2977570" y="2923295"/>
+            <a:ext cx="0" cy="1912349"/>
           </a:xfrm>
           <a:prstGeom prst="line">
             <a:avLst/>
@@ -24889,8 +24889,8 @@
         </p:nvSpPr>
         <p:spPr>
           <a:xfrm>
-            <a:off x="5581676" y="2837960"/>
-            <a:ext cx="0" cy="2104653"/>
+            <a:off x="5415815" y="2923295"/>
+            <a:ext cx="0" cy="1912349"/>
           </a:xfrm>
           <a:prstGeom prst="line">
             <a:avLst/>
@@ -24912,8 +24912,8 @@
         </p:nvSpPr>
         <p:spPr>
           <a:xfrm>
-            <a:off x="4161036" y="2837960"/>
-            <a:ext cx="0" cy="1683722"/>
+            <a:off x="4124979" y="2923295"/>
+            <a:ext cx="0" cy="1529879"/>
           </a:xfrm>
           <a:prstGeom prst="line">
             <a:avLst/>
@@ -24935,8 +24935,8 @@
         </p:nvSpPr>
         <p:spPr>
           <a:xfrm>
-            <a:off x="5265979" y="2837960"/>
-            <a:ext cx="0" cy="1683722"/>
+            <a:off x="5128962" y="2923295"/>
+            <a:ext cx="0" cy="1529879"/>
           </a:xfrm>
           <a:prstGeom prst="line">
             <a:avLst/>
@@ -24958,7 +24958,7 @@
         </p:nvSpPr>
         <p:spPr>
           <a:xfrm>
-            <a:off x="1324557" y="2685560"/>
+            <a:off x="1519264" y="2770895"/>
             <a:ext cx="621792" cy="304800"/>
           </a:xfrm>
           <a:prstGeom prst="rect">
@@ -24978,7 +24978,7 @@
         </p:nvSpPr>
         <p:spPr>
           <a:xfrm>
-            <a:off x="1278837" y="2647460"/>
+            <a:off x="1473544" y="2732795"/>
             <a:ext cx="713232" cy="381000"/>
           </a:xfrm>
           <a:prstGeom prst="rect">
@@ -25017,7 +25017,7 @@
         </p:nvSpPr>
         <p:spPr>
           <a:xfrm>
-            <a:off x="2587348" y="2685560"/>
+            <a:off x="2666674" y="2770895"/>
             <a:ext cx="621792" cy="304800"/>
           </a:xfrm>
           <a:prstGeom prst="rect">
@@ -25037,7 +25037,7 @@
         </p:nvSpPr>
         <p:spPr>
           <a:xfrm>
-            <a:off x="2541628" y="2647460"/>
+            <a:off x="2620954" y="2732795"/>
             <a:ext cx="713232" cy="381000"/>
           </a:xfrm>
           <a:prstGeom prst="rect">
@@ -25076,7 +25076,7 @@
         </p:nvSpPr>
         <p:spPr>
           <a:xfrm>
-            <a:off x="3850140" y="2685560"/>
+            <a:off x="3814083" y="2770895"/>
             <a:ext cx="621792" cy="304800"/>
           </a:xfrm>
           <a:prstGeom prst="rect">
@@ -25096,7 +25096,7 @@
         </p:nvSpPr>
         <p:spPr>
           <a:xfrm>
-            <a:off x="3804420" y="2647460"/>
+            <a:off x="3768363" y="2732795"/>
             <a:ext cx="713232" cy="381000"/>
           </a:xfrm>
           <a:prstGeom prst="rect">
@@ -25135,7 +25135,7 @@
         </p:nvSpPr>
         <p:spPr>
           <a:xfrm>
-            <a:off x="2697689" y="1226820"/>
+            <a:off x="2700093" y="1441959"/>
             <a:ext cx="2084832" cy="381000"/>
           </a:xfrm>
           <a:prstGeom prst="rect">
@@ -25174,7 +25174,7 @@
         </p:nvSpPr>
         <p:spPr>
           <a:xfrm>
-            <a:off x="2697689" y="5935980"/>
+            <a:off x="2700093" y="5720841"/>
             <a:ext cx="2084832" cy="381000"/>
           </a:xfrm>
           <a:prstGeom prst="rect">

--- a/dist/초4/사회·역사/지도와지역/초4_사회·역사_지도와지역_01_지도읽기.pptx
+++ b/dist/초4/사회·역사/지도와지역/초4_사회·역사_지도와지역_01_지도읽기.pptx
@@ -121,13 +121,13 @@
   <p:extLst>
     <p:ext uri="{521415D9-36F7-43E2-AB2F-B90AF26B5E84}">
       <p14:sectionLst xmlns:p14="http://schemas.microsoft.com/office/powerpoint/2010/main">
-        <p14:section name="도입" id="{761789bb-6b35-58b9-d4b0-90da370d2dda}">
+        <p14:section name="도입" id="{e593f4fa-c87f-8adb-2eb4-e5bf9fb55654}">
           <p14:sldIdLst>
             <p14:sldId id="256"/>
             <p14:sldId id="257"/>
           </p14:sldIdLst>
         </p14:section>
-        <p14:section name="개념" id="{4784c74f-a9c2-7a74-f625-795feb5f79ba}">
+        <p14:section name="개념" id="{6a676106-7bb8-38dd-ffae-18036cf862eb}">
           <p14:sldIdLst>
             <p14:sldId id="258"/>
             <p14:sldId id="259"/>
@@ -135,7 +135,7 @@
             <p14:sldId id="264"/>
           </p14:sldIdLst>
         </p14:section>
-        <p14:section name="연습" id="{b03641a0-64b4-1e5a-a8e3-bd457b91a7d4}">
+        <p14:section name="연습" id="{68ff6d07-cccd-748f-30ef-3a849263b383}">
           <p14:sldIdLst>
             <p14:sldId id="260"/>
             <p14:sldId id="261"/>
@@ -143,31 +143,31 @@
             <p14:sldId id="265"/>
           </p14:sldIdLst>
         </p14:section>
-        <p14:section name="개념" id="{c8a4eeb2-35be-3eb3-6f57-2fa30850bb28}">
+        <p14:section name="개념" id="{4a1e439b-d0bb-c4a6-8673-3a6890f62a44}">
           <p14:sldIdLst/>
         </p14:section>
-        <p14:section name="연습" id="{bf693493-2954-1dd4-29cc-841945da6fc5}">
+        <p14:section name="연습" id="{3a1ae034-30ea-5e64-cf98-a2da6a541bfe}">
           <p14:sldIdLst/>
         </p14:section>
-        <p14:section name="개념" id="{cf54ebec-a42a-40a9-cd37-c5d2c2c0fbba}">
+        <p14:section name="개념" id="{4abee313-6358-e5e4-c312-b7e8471884eb}">
           <p14:sldIdLst/>
         </p14:section>
-        <p14:section name="연습" id="{1530eeff-6d47-2bd9-ea8a-a76971a4c98d}">
+        <p14:section name="연습" id="{996733b4-45ac-8582-c0f6-1031a77c3f02}">
           <p14:sldIdLst/>
         </p14:section>
-        <p14:section name="확인" id="{e81c746f-b834-5ca0-cd16-ba361c6ae9b0}">
+        <p14:section name="확인" id="{1f7519c9-76a8-0f24-afad-74681e6f4e33}">
           <p14:sldIdLst>
             <p14:sldId id="266"/>
             <p14:sldId id="267"/>
             <p14:sldId id="268"/>
           </p14:sldIdLst>
         </p14:section>
-        <p14:section name="정리" id="{bebee90a-74a9-abf1-3511-334834d1013e}">
+        <p14:section name="정리" id="{dcfc1da4-e3f5-9567-01c3-eb42e74b264c}">
           <p14:sldIdLst>
             <p14:sldId id="269"/>
           </p14:sldIdLst>
         </p14:section>
-        <p14:section name="보충" id="{46f6520d-0dd7-dcf1-6301-d60fc31a20c4}">
+        <p14:section name="보충" id="{ce110dc9-1aa2-69c0-88bf-c8bf81889e11}">
           <p14:sldIdLst>
             <p14:sldId id="270"/>
           </p14:sldIdLst>
